--- a/pitch/Compose-pitch.pptx
+++ b/pitch/Compose-pitch.pptx
@@ -1399,7 +1399,7 @@
     <p:bg>
       <p:bgPr>
         <a:solidFill>
-          <a:srgbClr val="F7F6F2"/>
+          <a:srgbClr val="1A1613"/>
         </a:solidFill>
       </p:bgPr>
     </p:bg>
@@ -1516,39 +1516,54 @@
           </a:p>
         </p:txBody>
       </p:sp>
-      <p:pic>
-        <p:nvPicPr>
-          <p:cNvPr id="6" name="Image 0" descr="/private/tmp/claude-501/-Users-shazzadul-Documents-Projects-AI-Hackathon/897b972a-c7fd-436b-8660-8d0ac214ab10/scratchpad/deck/logo.png">    </p:cNvPr>
-          <p:cNvPicPr>
-            <a:picLocks noChangeAspect="1"/>
-          </p:cNvPicPr>
-          <p:nvPr/>
-        </p:nvPicPr>
-        <p:blipFill>
-          <a:blip r:embed="rId1"/>
-          <a:stretch>
-            <a:fillRect/>
-          </a:stretch>
-        </p:blipFill>
-        <p:spPr>
-          <a:xfrm>
-            <a:off x="566928" y="1600200"/>
-            <a:ext cx="5486400" cy="1435740"/>
-          </a:xfrm>
-          <a:prstGeom prst="rect">
-            <a:avLst/>
-          </a:prstGeom>
-        </p:spPr>
-      </p:pic>
-      <p:sp>
-        <p:nvSpPr>
-          <p:cNvPr id="7" name="Text 4"/>
-          <p:cNvSpPr/>
-          <p:nvPr/>
-        </p:nvSpPr>
-        <p:spPr>
-          <a:xfrm>
-            <a:off x="685800" y="3429000"/>
+      <p:sp>
+        <p:nvSpPr>
+          <p:cNvPr id="6" name="Text 4"/>
+          <p:cNvSpPr/>
+          <p:nvPr/>
+        </p:nvSpPr>
+        <p:spPr>
+          <a:xfrm>
+            <a:off x="658368" y="1691640"/>
+            <a:ext cx="5852160" cy="825500"/>
+          </a:xfrm>
+          <a:prstGeom prst="rect">
+            <a:avLst/>
+          </a:prstGeom>
+          <a:noFill/>
+          <a:ln/>
+        </p:spPr>
+        <p:txBody>
+          <a:bodyPr wrap="square" lIns="0" tIns="0" rIns="0" bIns="0" rtlCol="0" anchor="ctr"/>
+          <a:lstStyle/>
+          <a:p>
+            <a:pPr algn="l" indent="0" marL="0">
+              <a:buNone/>
+            </a:pPr>
+            <a:r>
+              <a:rPr lang="en-US" sz="5000" spc="1700" kern="0" dirty="0">
+                <a:solidFill>
+                  <a:srgbClr val="C9A227"/>
+                </a:solidFill>
+                <a:latin typeface="Baskervville" pitchFamily="34" charset="0"/>
+                <a:ea typeface="Baskervville" pitchFamily="34" charset="-122"/>
+                <a:cs typeface="Baskervville" pitchFamily="34" charset="-120"/>
+              </a:rPr>
+              <a:t>COMPOSE</a:t>
+            </a:r>
+            <a:endParaRPr lang="en-US" sz="5000" dirty="0"/>
+          </a:p>
+        </p:txBody>
+      </p:sp>
+      <p:sp>
+        <p:nvSpPr>
+          <p:cNvPr id="7" name="Text 5"/>
+          <p:cNvSpPr/>
+          <p:nvPr/>
+        </p:nvSpPr>
+        <p:spPr>
+          <a:xfrm>
+            <a:off x="685800" y="2880360"/>
             <a:ext cx="5486400" cy="1371600"/>
           </a:xfrm>
           <a:prstGeom prst="rect">
@@ -1570,7 +1585,7 @@
             <a:r>
               <a:rPr lang="en-US" sz="2600" b="1" dirty="0">
                 <a:solidFill>
-                  <a:srgbClr val="1E1E1E"/>
+                  <a:srgbClr val="F2EFE9"/>
                 </a:solidFill>
                 <a:latin typeface="Baskervville" pitchFamily="34" charset="0"/>
                 <a:ea typeface="Baskervville" pitchFamily="34" charset="-122"/>
@@ -1584,7 +1599,7 @@
       </p:sp>
       <p:sp>
         <p:nvSpPr>
-          <p:cNvPr id="8" name="Shape 5"/>
+          <p:cNvPr id="8" name="Shape 6"/>
           <p:cNvSpPr/>
           <p:nvPr/>
         </p:nvSpPr>
@@ -1600,21 +1615,21 @@
           </a:prstGeom>
           <a:solidFill>
             <a:srgbClr val="FFFFFF">
-              <a:alpha val="58000"/>
+              <a:alpha val="12000"/>
             </a:srgbClr>
           </a:solidFill>
-          <a:ln w="19050">
+          <a:ln w="12700">
             <a:solidFill>
               <a:srgbClr val="FFFFFF">
-                <a:alpha val="90000"/>
+                <a:alpha val="32000"/>
               </a:srgbClr>
             </a:solidFill>
             <a:prstDash val="solid"/>
           </a:ln>
           <a:effectLst>
-            <a:outerShdw sx="100000" sy="100000" kx="0" ky="0" algn="bl" rotWithShape="0" blurRad="203200" dist="63500" dir="5400000">
+            <a:outerShdw sx="100000" sy="100000" kx="0" ky="0" algn="bl" rotWithShape="0" blurRad="228600" dist="76200" dir="5400000">
               <a:srgbClr val="000000">
-                <a:alpha val="14000"/>
+                <a:alpha val="40000"/>
               </a:srgbClr>
             </a:outerShdw>
           </a:effectLst>
@@ -1622,14 +1637,14 @@
       </p:sp>
       <p:pic>
         <p:nvPicPr>
-          <p:cNvPr id="9" name="Image 1" descr="/Users/shazzadul/Documents/Projects/AI Hackathon/aihackathon/pitch/screenshots/07-latex.png">    </p:cNvPr>
+          <p:cNvPr id="9" name="Image 0" descr="/Users/shazzadul/Documents/Projects/AI Hackathon/aihackathon/pitch/screenshots/07-latex.png">    </p:cNvPr>
           <p:cNvPicPr>
             <a:picLocks noChangeAspect="1"/>
           </p:cNvPicPr>
           <p:nvPr/>
         </p:nvPicPr>
         <p:blipFill>
-          <a:blip r:embed="rId2"/>
+          <a:blip r:embed="rId1"/>
           <a:stretch>
             <a:fillRect/>
           </a:stretch>
@@ -1658,7 +1673,7 @@
     <p:bg>
       <p:bgPr>
         <a:solidFill>
-          <a:srgbClr val="F7F6F2"/>
+          <a:srgbClr val="1A1613"/>
         </a:solidFill>
       </p:bgPr>
     </p:bg>
@@ -1684,8 +1699,8 @@
         </p:nvSpPr>
         <p:spPr>
           <a:xfrm>
-            <a:off x="4480560" y="1600200"/>
-            <a:ext cx="3246120" cy="3246120"/>
+            <a:off x="4818888" y="2560320"/>
+            <a:ext cx="2560320" cy="2560320"/>
           </a:xfrm>
           <a:prstGeom prst="ellipse">
             <a:avLst/>
@@ -1726,7 +1741,7 @@
             <a:r>
               <a:rPr lang="en-US" sz="3800" b="1" dirty="0">
                 <a:solidFill>
-                  <a:srgbClr val="1E1E1E"/>
+                  <a:srgbClr val="F2EFE9"/>
                 </a:solidFill>
                 <a:latin typeface="Baskervville" pitchFamily="34" charset="0"/>
                 <a:ea typeface="Baskervville" pitchFamily="34" charset="-122"/>
@@ -1756,582 +1771,29 @@
           </a:prstGeom>
           <a:solidFill>
             <a:srgbClr val="FFFFFF">
-              <a:alpha val="58000"/>
+              <a:alpha val="12000"/>
             </a:srgbClr>
           </a:solidFill>
-          <a:ln w="19050">
+          <a:ln w="12700">
             <a:solidFill>
               <a:srgbClr val="FFFFFF">
-                <a:alpha val="90000"/>
+                <a:alpha val="32000"/>
               </a:srgbClr>
             </a:solidFill>
             <a:prstDash val="solid"/>
           </a:ln>
           <a:effectLst>
-            <a:outerShdw sx="100000" sy="100000" kx="0" ky="0" algn="bl" rotWithShape="0" blurRad="203200" dist="63500" dir="5400000">
+            <a:outerShdw sx="100000" sy="100000" kx="0" ky="0" algn="bl" rotWithShape="0" blurRad="228600" dist="76200" dir="5400000">
               <a:srgbClr val="000000">
-                <a:alpha val="14000"/>
+                <a:alpha val="40000"/>
               </a:srgbClr>
             </a:outerShdw>
           </a:effectLst>
         </p:spPr>
       </p:sp>
-      <p:sp>
-        <p:nvSpPr>
-          <p:cNvPr id="5" name="Shape 3"/>
-          <p:cNvSpPr/>
-          <p:nvPr/>
-        </p:nvSpPr>
-        <p:spPr>
-          <a:xfrm>
-            <a:off x="960120" y="2423160"/>
-            <a:ext cx="502920" cy="502920"/>
-          </a:xfrm>
-          <a:prstGeom prst="rect">
-            <a:avLst/>
-          </a:prstGeom>
-          <a:solidFill>
-            <a:srgbClr val="2554E8"/>
-          </a:solidFill>
-          <a:ln/>
-        </p:spPr>
-      </p:sp>
-      <p:sp>
-        <p:nvSpPr>
-          <p:cNvPr id="6" name="Text 4"/>
-          <p:cNvSpPr/>
-          <p:nvPr/>
-        </p:nvSpPr>
-        <p:spPr>
-          <a:xfrm>
-            <a:off x="960120" y="3063240"/>
-            <a:ext cx="2651760" cy="457200"/>
-          </a:xfrm>
-          <a:prstGeom prst="rect">
-            <a:avLst/>
-          </a:prstGeom>
-          <a:noFill/>
-          <a:ln/>
-        </p:spPr>
-        <p:txBody>
-          <a:bodyPr wrap="square" lIns="0" tIns="0" rIns="0" bIns="0" rtlCol="0" anchor="t"/>
-          <a:lstStyle/>
-          <a:p>
-            <a:pPr indent="0" marL="0">
-              <a:buNone/>
-            </a:pPr>
-            <a:r>
-              <a:rPr lang="en-US" sz="2400" b="1" dirty="0">
-                <a:solidFill>
-                  <a:srgbClr val="1E1E1E"/>
-                </a:solidFill>
-                <a:latin typeface="Baskervville" pitchFamily="34" charset="0"/>
-                <a:ea typeface="Baskervville" pitchFamily="34" charset="-122"/>
-                <a:cs typeface="Baskervville" pitchFamily="34" charset="-120"/>
-              </a:rPr>
-              <a:t>Word</a:t>
-            </a:r>
-            <a:endParaRPr lang="en-US" sz="2400" dirty="0"/>
-          </a:p>
-        </p:txBody>
-      </p:sp>
-      <p:sp>
-        <p:nvSpPr>
-          <p:cNvPr id="7" name="Text 5"/>
-          <p:cNvSpPr/>
-          <p:nvPr/>
-        </p:nvSpPr>
-        <p:spPr>
-          <a:xfrm>
-            <a:off x="960120" y="3566160"/>
-            <a:ext cx="2651760" cy="1005840"/>
-          </a:xfrm>
-          <a:prstGeom prst="rect">
-            <a:avLst/>
-          </a:prstGeom>
-          <a:noFill/>
-          <a:ln/>
-        </p:spPr>
-        <p:txBody>
-          <a:bodyPr wrap="square" lIns="0" tIns="0" rIns="0" bIns="0" rtlCol="0" anchor="t"/>
-          <a:lstStyle/>
-          <a:p>
-            <a:pPr indent="0" marL="0">
-              <a:buNone/>
-            </a:pPr>
-            <a:r>
-              <a:rPr lang="en-US" sz="1500" dirty="0">
-                <a:solidFill>
-                  <a:srgbClr val="5E5A54"/>
-                </a:solidFill>
-                <a:latin typeface="Satoshi" pitchFamily="34" charset="0"/>
-                <a:ea typeface="Satoshi" pitchFamily="34" charset="-122"/>
-                <a:cs typeface="Satoshi" pitchFamily="34" charset="-120"/>
-              </a:rPr>
-              <a:t>Easy to write in, but it comes out as a wall of text.</a:t>
-            </a:r>
-            <a:endParaRPr lang="en-US" sz="1500" dirty="0"/>
-          </a:p>
-        </p:txBody>
-      </p:sp>
-      <p:sp>
-        <p:nvSpPr>
-          <p:cNvPr id="8" name="Shape 6"/>
-          <p:cNvSpPr/>
-          <p:nvPr/>
-        </p:nvSpPr>
-        <p:spPr>
-          <a:xfrm>
-            <a:off x="8257032" y="2148840"/>
-            <a:ext cx="3291840" cy="2651760"/>
-          </a:xfrm>
-          <a:prstGeom prst="roundRect">
-            <a:avLst>
-              <a:gd name="adj" fmla="val 5517"/>
-            </a:avLst>
-          </a:prstGeom>
-          <a:solidFill>
-            <a:srgbClr val="FFFFFF">
-              <a:alpha val="58000"/>
-            </a:srgbClr>
-          </a:solidFill>
-          <a:ln w="19050">
-            <a:solidFill>
-              <a:srgbClr val="FFFFFF">
-                <a:alpha val="90000"/>
-              </a:srgbClr>
-            </a:solidFill>
-            <a:prstDash val="solid"/>
-          </a:ln>
-          <a:effectLst>
-            <a:outerShdw sx="100000" sy="100000" kx="0" ky="0" algn="bl" rotWithShape="0" blurRad="203200" dist="63500" dir="5400000">
-              <a:srgbClr val="000000">
-                <a:alpha val="14000"/>
-              </a:srgbClr>
-            </a:outerShdw>
-          </a:effectLst>
-        </p:spPr>
-      </p:sp>
-      <p:sp>
-        <p:nvSpPr>
-          <p:cNvPr id="9" name="Shape 7"/>
-          <p:cNvSpPr/>
-          <p:nvPr/>
-        </p:nvSpPr>
-        <p:spPr>
-          <a:xfrm>
-            <a:off x="8577072" y="2423160"/>
-            <a:ext cx="548640" cy="493776"/>
-          </a:xfrm>
-          <a:prstGeom prst="triangle">
-            <a:avLst/>
-          </a:prstGeom>
-          <a:solidFill>
-            <a:srgbClr val="C9A227"/>
-          </a:solidFill>
-          <a:ln/>
-        </p:spPr>
-      </p:sp>
-      <p:sp>
-        <p:nvSpPr>
-          <p:cNvPr id="10" name="Text 8"/>
-          <p:cNvSpPr/>
-          <p:nvPr/>
-        </p:nvSpPr>
-        <p:spPr>
-          <a:xfrm>
-            <a:off x="8577072" y="3063240"/>
-            <a:ext cx="2651760" cy="457200"/>
-          </a:xfrm>
-          <a:prstGeom prst="rect">
-            <a:avLst/>
-          </a:prstGeom>
-          <a:noFill/>
-          <a:ln/>
-        </p:spPr>
-        <p:txBody>
-          <a:bodyPr wrap="square" lIns="0" tIns="0" rIns="0" bIns="0" rtlCol="0" anchor="t"/>
-          <a:lstStyle/>
-          <a:p>
-            <a:pPr indent="0" marL="0">
-              <a:buNone/>
-            </a:pPr>
-            <a:r>
-              <a:rPr lang="en-US" sz="2400" b="1" dirty="0">
-                <a:solidFill>
-                  <a:srgbClr val="1E1E1E"/>
-                </a:solidFill>
-                <a:latin typeface="Baskervville" pitchFamily="34" charset="0"/>
-                <a:ea typeface="Baskervville" pitchFamily="34" charset="-122"/>
-                <a:cs typeface="Baskervville" pitchFamily="34" charset="-120"/>
-              </a:rPr>
-              <a:t>Canva</a:t>
-            </a:r>
-            <a:endParaRPr lang="en-US" sz="2400" dirty="0"/>
-          </a:p>
-        </p:txBody>
-      </p:sp>
-      <p:sp>
-        <p:nvSpPr>
-          <p:cNvPr id="11" name="Text 9"/>
-          <p:cNvSpPr/>
-          <p:nvPr/>
-        </p:nvSpPr>
-        <p:spPr>
-          <a:xfrm>
-            <a:off x="8577072" y="3566160"/>
-            <a:ext cx="2651760" cy="1005840"/>
-          </a:xfrm>
-          <a:prstGeom prst="rect">
-            <a:avLst/>
-          </a:prstGeom>
-          <a:noFill/>
-          <a:ln/>
-        </p:spPr>
-        <p:txBody>
-          <a:bodyPr wrap="square" lIns="0" tIns="0" rIns="0" bIns="0" rtlCol="0" anchor="t"/>
-          <a:lstStyle/>
-          <a:p>
-            <a:pPr indent="0" marL="0">
-              <a:buNone/>
-            </a:pPr>
-            <a:r>
-              <a:rPr lang="en-US" sz="1500" dirty="0">
-                <a:solidFill>
-                  <a:srgbClr val="5E5A54"/>
-                </a:solidFill>
-                <a:latin typeface="Satoshi" pitchFamily="34" charset="0"/>
-                <a:ea typeface="Satoshi" pitchFamily="34" charset="-122"/>
-                <a:cs typeface="Satoshi" pitchFamily="34" charset="-120"/>
-              </a:rPr>
-              <a:t>Looks great, but every chart and layout is made by hand.</a:t>
-            </a:r>
-            <a:endParaRPr lang="en-US" sz="1500" dirty="0"/>
-          </a:p>
-        </p:txBody>
-      </p:sp>
-      <p:sp>
-        <p:nvSpPr>
-          <p:cNvPr id="12" name="Shape 10"/>
-          <p:cNvSpPr/>
-          <p:nvPr/>
-        </p:nvSpPr>
-        <p:spPr>
-          <a:xfrm>
-            <a:off x="4206240" y="1874520"/>
-            <a:ext cx="3776472" cy="3200400"/>
-          </a:xfrm>
-          <a:prstGeom prst="roundRect">
-            <a:avLst>
-              <a:gd name="adj" fmla="val 4571"/>
-            </a:avLst>
-          </a:prstGeom>
-          <a:solidFill>
-            <a:srgbClr val="FFFFFF">
-              <a:alpha val="75000"/>
-            </a:srgbClr>
-          </a:solidFill>
-          <a:ln w="19050">
-            <a:solidFill>
-              <a:srgbClr val="FFFFFF">
-                <a:alpha val="90000"/>
-              </a:srgbClr>
-            </a:solidFill>
-            <a:prstDash val="solid"/>
-          </a:ln>
-          <a:effectLst>
-            <a:outerShdw sx="100000" sy="100000" kx="0" ky="0" algn="bl" rotWithShape="0" blurRad="203200" dist="63500" dir="5400000">
-              <a:srgbClr val="000000">
-                <a:alpha val="14000"/>
-              </a:srgbClr>
-            </a:outerShdw>
-          </a:effectLst>
-        </p:spPr>
-      </p:sp>
-      <p:sp>
-        <p:nvSpPr>
-          <p:cNvPr id="13" name="Text 11"/>
-          <p:cNvSpPr/>
-          <p:nvPr/>
-        </p:nvSpPr>
-        <p:spPr>
-          <a:xfrm>
-            <a:off x="4526280" y="2240280"/>
-            <a:ext cx="3108960" cy="548640"/>
-          </a:xfrm>
-          <a:prstGeom prst="rect">
-            <a:avLst/>
-          </a:prstGeom>
-          <a:noFill/>
-          <a:ln/>
-        </p:spPr>
-        <p:txBody>
-          <a:bodyPr wrap="square" lIns="0" tIns="0" rIns="0" bIns="0" rtlCol="0" anchor="t"/>
-          <a:lstStyle/>
-          <a:p>
-            <a:pPr indent="0" marL="0">
-              <a:buNone/>
-            </a:pPr>
-            <a:r>
-              <a:rPr lang="en-US" sz="3000" b="1" dirty="0">
-                <a:solidFill>
-                  <a:srgbClr val="C0392B"/>
-                </a:solidFill>
-                <a:latin typeface="Baskervville" pitchFamily="34" charset="0"/>
-                <a:ea typeface="Baskervville" pitchFamily="34" charset="-122"/>
-                <a:cs typeface="Baskervville" pitchFamily="34" charset="-120"/>
-              </a:rPr>
-              <a:t>Compose</a:t>
-            </a:r>
-            <a:endParaRPr lang="en-US" sz="3000" dirty="0"/>
-          </a:p>
-        </p:txBody>
-      </p:sp>
-      <p:sp>
-        <p:nvSpPr>
-          <p:cNvPr id="14" name="Text 12"/>
-          <p:cNvSpPr/>
-          <p:nvPr/>
-        </p:nvSpPr>
-        <p:spPr>
-          <a:xfrm>
-            <a:off x="4526280" y="2880360"/>
-            <a:ext cx="3154680" cy="1737360"/>
-          </a:xfrm>
-          <a:prstGeom prst="rect">
-            <a:avLst/>
-          </a:prstGeom>
-          <a:noFill/>
-          <a:ln/>
-        </p:spPr>
-        <p:txBody>
-          <a:bodyPr wrap="square" lIns="0" tIns="0" rIns="0" bIns="0" rtlCol="0" anchor="t"/>
-          <a:lstStyle/>
-          <a:p>
-            <a:pPr indent="0" marL="0">
-              <a:lnSpc>
-                <a:spcPct val="105000"/>
-              </a:lnSpc>
-              <a:buNone/>
-            </a:pPr>
-            <a:r>
-              <a:rPr lang="en-US" sz="1900" b="1" dirty="0">
-                <a:solidFill>
-                  <a:srgbClr val="1E1E1E"/>
-                </a:solidFill>
-                <a:latin typeface="Baskervville" pitchFamily="34" charset="0"/>
-                <a:ea typeface="Baskervville" pitchFamily="34" charset="-122"/>
-                <a:cs typeface="Baskervville" pitchFamily="34" charset="-120"/>
-              </a:rPr>
-              <a:t>Write like in Word. Get a designed document like Canva, automatically.</a:t>
-            </a:r>
-            <a:endParaRPr lang="en-US" sz="1900" dirty="0"/>
-          </a:p>
-        </p:txBody>
-      </p:sp>
-      <p:sp>
-        <p:nvSpPr>
-          <p:cNvPr id="15" name="Shape 13"/>
-          <p:cNvSpPr/>
-          <p:nvPr/>
-        </p:nvSpPr>
-        <p:spPr>
-          <a:xfrm>
-            <a:off x="640080" y="5440680"/>
-            <a:ext cx="10908792" cy="0"/>
-          </a:xfrm>
-          <a:prstGeom prst="line">
-            <a:avLst/>
-          </a:prstGeom>
-          <a:noFill/>
-          <a:ln w="31750">
-            <a:solidFill>
-              <a:srgbClr val="1E1E1E"/>
-            </a:solidFill>
-            <a:prstDash val="solid"/>
-          </a:ln>
-        </p:spPr>
-      </p:sp>
-      <p:sp>
-        <p:nvSpPr>
-          <p:cNvPr id="16" name="Shape 14"/>
-          <p:cNvSpPr/>
-          <p:nvPr/>
-        </p:nvSpPr>
-        <p:spPr>
-          <a:xfrm>
-            <a:off x="640080" y="5330952"/>
-            <a:ext cx="219456" cy="219456"/>
-          </a:xfrm>
-          <a:prstGeom prst="rect">
-            <a:avLst/>
-          </a:prstGeom>
-          <a:solidFill>
-            <a:srgbClr val="2554E8"/>
-          </a:solidFill>
-          <a:ln/>
-        </p:spPr>
-      </p:sp>
-      <p:sp>
-        <p:nvSpPr>
-          <p:cNvPr id="17" name="Shape 15"/>
-          <p:cNvSpPr/>
-          <p:nvPr/>
-        </p:nvSpPr>
-        <p:spPr>
-          <a:xfrm>
-            <a:off x="5952744" y="5303520"/>
-            <a:ext cx="274320" cy="274320"/>
-          </a:xfrm>
-          <a:prstGeom prst="ellipse">
-            <a:avLst/>
-          </a:prstGeom>
-          <a:solidFill>
-            <a:srgbClr val="C0392B"/>
-          </a:solidFill>
-          <a:ln/>
-        </p:spPr>
-      </p:sp>
-      <p:sp>
-        <p:nvSpPr>
-          <p:cNvPr id="18" name="Shape 16"/>
-          <p:cNvSpPr/>
-          <p:nvPr/>
-        </p:nvSpPr>
-        <p:spPr>
-          <a:xfrm>
-            <a:off x="11311128" y="5321808"/>
-            <a:ext cx="246888" cy="222199"/>
-          </a:xfrm>
-          <a:prstGeom prst="triangle">
-            <a:avLst/>
-          </a:prstGeom>
-          <a:solidFill>
-            <a:srgbClr val="C9A227"/>
-          </a:solidFill>
-          <a:ln/>
-        </p:spPr>
-      </p:sp>
-      <p:sp>
-        <p:nvSpPr>
-          <p:cNvPr id="19" name="Text 17"/>
-          <p:cNvSpPr/>
-          <p:nvPr/>
-        </p:nvSpPr>
-        <p:spPr>
-          <a:xfrm>
-            <a:off x="640080" y="5623560"/>
-            <a:ext cx="3291840" cy="274320"/>
-          </a:xfrm>
-          <a:prstGeom prst="rect">
-            <a:avLst/>
-          </a:prstGeom>
-          <a:noFill/>
-          <a:ln/>
-        </p:spPr>
-        <p:txBody>
-          <a:bodyPr wrap="square" lIns="0" tIns="0" rIns="0" bIns="0" rtlCol="0" anchor="t"/>
-          <a:lstStyle/>
-          <a:p>
-            <a:pPr indent="0" marL="0">
-              <a:buNone/>
-            </a:pPr>
-            <a:r>
-              <a:rPr lang="en-US" sz="1100" spc="300" kern="0" dirty="0">
-                <a:solidFill>
-                  <a:srgbClr val="1E1E1E"/>
-                </a:solidFill>
-                <a:latin typeface="Roboto Mono" pitchFamily="34" charset="0"/>
-                <a:ea typeface="Roboto Mono" pitchFamily="34" charset="-122"/>
-                <a:cs typeface="Roboto Mono" pitchFamily="34" charset="-120"/>
-              </a:rPr>
-              <a:t>EASY TO WRITE</a:t>
-            </a:r>
-            <a:endParaRPr lang="en-US" sz="1100" dirty="0"/>
-          </a:p>
-        </p:txBody>
-      </p:sp>
-      <p:sp>
-        <p:nvSpPr>
-          <p:cNvPr id="20" name="Text 18"/>
-          <p:cNvSpPr/>
-          <p:nvPr/>
-        </p:nvSpPr>
-        <p:spPr>
-          <a:xfrm>
-            <a:off x="4206240" y="5623560"/>
-            <a:ext cx="3776472" cy="274320"/>
-          </a:xfrm>
-          <a:prstGeom prst="rect">
-            <a:avLst/>
-          </a:prstGeom>
-          <a:noFill/>
-          <a:ln/>
-        </p:spPr>
-        <p:txBody>
-          <a:bodyPr wrap="square" lIns="0" tIns="0" rIns="0" bIns="0" rtlCol="0" anchor="t"/>
-          <a:lstStyle/>
-          <a:p>
-            <a:pPr algn="ctr" indent="0" marL="0">
-              <a:buNone/>
-            </a:pPr>
-            <a:r>
-              <a:rPr lang="en-US" sz="1100" spc="300" kern="0" dirty="0">
-                <a:solidFill>
-                  <a:srgbClr val="C0392B"/>
-                </a:solidFill>
-                <a:latin typeface="Roboto Mono" pitchFamily="34" charset="0"/>
-                <a:ea typeface="Roboto Mono" pitchFamily="34" charset="-122"/>
-                <a:cs typeface="Roboto Mono" pitchFamily="34" charset="-120"/>
-              </a:rPr>
-              <a:t>BOTH</a:t>
-            </a:r>
-            <a:endParaRPr lang="en-US" sz="1100" dirty="0"/>
-          </a:p>
-        </p:txBody>
-      </p:sp>
-      <p:sp>
-        <p:nvSpPr>
-          <p:cNvPr id="21" name="Text 19"/>
-          <p:cNvSpPr/>
-          <p:nvPr/>
-        </p:nvSpPr>
-        <p:spPr>
-          <a:xfrm>
-            <a:off x="8257032" y="5623560"/>
-            <a:ext cx="3291840" cy="274320"/>
-          </a:xfrm>
-          <a:prstGeom prst="rect">
-            <a:avLst/>
-          </a:prstGeom>
-          <a:noFill/>
-          <a:ln/>
-        </p:spPr>
-        <p:txBody>
-          <a:bodyPr wrap="square" lIns="0" tIns="0" rIns="0" bIns="0" rtlCol="0" anchor="t"/>
-          <a:lstStyle/>
-          <a:p>
-            <a:pPr algn="r" indent="0" marL="0">
-              <a:buNone/>
-            </a:pPr>
-            <a:r>
-              <a:rPr lang="en-US" sz="1100" spc="300" kern="0" dirty="0">
-                <a:solidFill>
-                  <a:srgbClr val="1E1E1E"/>
-                </a:solidFill>
-                <a:latin typeface="Roboto Mono" pitchFamily="34" charset="0"/>
-                <a:ea typeface="Roboto Mono" pitchFamily="34" charset="-122"/>
-                <a:cs typeface="Roboto Mono" pitchFamily="34" charset="-120"/>
-              </a:rPr>
-              <a:t>DESIGNED TO READ</a:t>
-            </a:r>
-            <a:endParaRPr lang="en-US" sz="1100" dirty="0"/>
-          </a:p>
-        </p:txBody>
-      </p:sp>
       <p:pic>
         <p:nvPicPr>
-          <p:cNvPr id="22" name="Image 0" descr="/private/tmp/claude-501/-Users-shazzadul-Documents-Projects-AI-Hackathon/897b972a-c7fd-436b-8660-8d0ac214ab10/scratchpad/deck/logo.png">    </p:cNvPr>
+          <p:cNvPr id="5" name="Image 0" descr="/private/tmp/claude-501/-Users-shazzadul-Documents-Projects-AI-Hackathon/897b972a-c7fd-436b-8660-8d0ac214ab10/scratchpad/deck/word.png">    </p:cNvPr>
           <p:cNvPicPr>
             <a:picLocks noChangeAspect="1"/>
           </p:cNvPicPr>
@@ -2345,8 +1807,8 @@
         </p:blipFill>
         <p:spPr>
           <a:xfrm>
-            <a:off x="640080" y="6236208"/>
-            <a:ext cx="1051560" cy="275183"/>
+            <a:off x="960120" y="2377440"/>
+            <a:ext cx="566928" cy="566928"/>
           </a:xfrm>
           <a:prstGeom prst="rect">
             <a:avLst/>
@@ -2355,7 +1817,583 @@
       </p:pic>
       <p:sp>
         <p:nvSpPr>
-          <p:cNvPr id="23" name="Text 20"/>
+          <p:cNvPr id="6" name="Text 3"/>
+          <p:cNvSpPr/>
+          <p:nvPr/>
+        </p:nvSpPr>
+        <p:spPr>
+          <a:xfrm>
+            <a:off x="960120" y="3063240"/>
+            <a:ext cx="2651760" cy="457200"/>
+          </a:xfrm>
+          <a:prstGeom prst="rect">
+            <a:avLst/>
+          </a:prstGeom>
+          <a:noFill/>
+          <a:ln/>
+        </p:spPr>
+        <p:txBody>
+          <a:bodyPr wrap="square" lIns="0" tIns="0" rIns="0" bIns="0" rtlCol="0" anchor="t"/>
+          <a:lstStyle/>
+          <a:p>
+            <a:pPr indent="0" marL="0">
+              <a:buNone/>
+            </a:pPr>
+            <a:r>
+              <a:rPr lang="en-US" sz="2400" b="1" dirty="0">
+                <a:solidFill>
+                  <a:srgbClr val="F2EFE9"/>
+                </a:solidFill>
+                <a:latin typeface="Baskervville" pitchFamily="34" charset="0"/>
+                <a:ea typeface="Baskervville" pitchFamily="34" charset="-122"/>
+                <a:cs typeface="Baskervville" pitchFamily="34" charset="-120"/>
+              </a:rPr>
+              <a:t>Word</a:t>
+            </a:r>
+            <a:endParaRPr lang="en-US" sz="2400" dirty="0"/>
+          </a:p>
+        </p:txBody>
+      </p:sp>
+      <p:sp>
+        <p:nvSpPr>
+          <p:cNvPr id="7" name="Text 4"/>
+          <p:cNvSpPr/>
+          <p:nvPr/>
+        </p:nvSpPr>
+        <p:spPr>
+          <a:xfrm>
+            <a:off x="960120" y="3566160"/>
+            <a:ext cx="2651760" cy="1005840"/>
+          </a:xfrm>
+          <a:prstGeom prst="rect">
+            <a:avLst/>
+          </a:prstGeom>
+          <a:noFill/>
+          <a:ln/>
+        </p:spPr>
+        <p:txBody>
+          <a:bodyPr wrap="square" lIns="0" tIns="0" rIns="0" bIns="0" rtlCol="0" anchor="t"/>
+          <a:lstStyle/>
+          <a:p>
+            <a:pPr indent="0" marL="0">
+              <a:buNone/>
+            </a:pPr>
+            <a:r>
+              <a:rPr lang="en-US" sz="1500" dirty="0">
+                <a:solidFill>
+                  <a:srgbClr val="B3AA9E"/>
+                </a:solidFill>
+                <a:latin typeface="Satoshi" pitchFamily="34" charset="0"/>
+                <a:ea typeface="Satoshi" pitchFamily="34" charset="-122"/>
+                <a:cs typeface="Satoshi" pitchFamily="34" charset="-120"/>
+              </a:rPr>
+              <a:t>Easy to write in, but it comes out as a wall of text.</a:t>
+            </a:r>
+            <a:endParaRPr lang="en-US" sz="1500" dirty="0"/>
+          </a:p>
+        </p:txBody>
+      </p:sp>
+      <p:sp>
+        <p:nvSpPr>
+          <p:cNvPr id="8" name="Shape 5"/>
+          <p:cNvSpPr/>
+          <p:nvPr/>
+        </p:nvSpPr>
+        <p:spPr>
+          <a:xfrm>
+            <a:off x="8257032" y="2148840"/>
+            <a:ext cx="3291840" cy="2651760"/>
+          </a:xfrm>
+          <a:prstGeom prst="roundRect">
+            <a:avLst>
+              <a:gd name="adj" fmla="val 5517"/>
+            </a:avLst>
+          </a:prstGeom>
+          <a:solidFill>
+            <a:srgbClr val="FFFFFF">
+              <a:alpha val="12000"/>
+            </a:srgbClr>
+          </a:solidFill>
+          <a:ln w="12700">
+            <a:solidFill>
+              <a:srgbClr val="FFFFFF">
+                <a:alpha val="32000"/>
+              </a:srgbClr>
+            </a:solidFill>
+            <a:prstDash val="solid"/>
+          </a:ln>
+          <a:effectLst>
+            <a:outerShdw sx="100000" sy="100000" kx="0" ky="0" algn="bl" rotWithShape="0" blurRad="228600" dist="76200" dir="5400000">
+              <a:srgbClr val="000000">
+                <a:alpha val="40000"/>
+              </a:srgbClr>
+            </a:outerShdw>
+          </a:effectLst>
+        </p:spPr>
+      </p:sp>
+      <p:pic>
+        <p:nvPicPr>
+          <p:cNvPr id="9" name="Image 1" descr="/private/tmp/claude-501/-Users-shazzadul-Documents-Projects-AI-Hackathon/897b972a-c7fd-436b-8660-8d0ac214ab10/scratchpad/deck/canva.png">    </p:cNvPr>
+          <p:cNvPicPr>
+            <a:picLocks noChangeAspect="1"/>
+          </p:cNvPicPr>
+          <p:nvPr/>
+        </p:nvPicPr>
+        <p:blipFill>
+          <a:blip r:embed="rId2"/>
+          <a:stretch>
+            <a:fillRect/>
+          </a:stretch>
+        </p:blipFill>
+        <p:spPr>
+          <a:xfrm>
+            <a:off x="8577072" y="2377440"/>
+            <a:ext cx="566928" cy="566928"/>
+          </a:xfrm>
+          <a:prstGeom prst="rect">
+            <a:avLst/>
+          </a:prstGeom>
+        </p:spPr>
+      </p:pic>
+      <p:sp>
+        <p:nvSpPr>
+          <p:cNvPr id="10" name="Text 6"/>
+          <p:cNvSpPr/>
+          <p:nvPr/>
+        </p:nvSpPr>
+        <p:spPr>
+          <a:xfrm>
+            <a:off x="8577072" y="3063240"/>
+            <a:ext cx="2651760" cy="457200"/>
+          </a:xfrm>
+          <a:prstGeom prst="rect">
+            <a:avLst/>
+          </a:prstGeom>
+          <a:noFill/>
+          <a:ln/>
+        </p:spPr>
+        <p:txBody>
+          <a:bodyPr wrap="square" lIns="0" tIns="0" rIns="0" bIns="0" rtlCol="0" anchor="t"/>
+          <a:lstStyle/>
+          <a:p>
+            <a:pPr indent="0" marL="0">
+              <a:buNone/>
+            </a:pPr>
+            <a:r>
+              <a:rPr lang="en-US" sz="2400" b="1" dirty="0">
+                <a:solidFill>
+                  <a:srgbClr val="F2EFE9"/>
+                </a:solidFill>
+                <a:latin typeface="Baskervville" pitchFamily="34" charset="0"/>
+                <a:ea typeface="Baskervville" pitchFamily="34" charset="-122"/>
+                <a:cs typeface="Baskervville" pitchFamily="34" charset="-120"/>
+              </a:rPr>
+              <a:t>Canva</a:t>
+            </a:r>
+            <a:endParaRPr lang="en-US" sz="2400" dirty="0"/>
+          </a:p>
+        </p:txBody>
+      </p:sp>
+      <p:sp>
+        <p:nvSpPr>
+          <p:cNvPr id="11" name="Text 7"/>
+          <p:cNvSpPr/>
+          <p:nvPr/>
+        </p:nvSpPr>
+        <p:spPr>
+          <a:xfrm>
+            <a:off x="8577072" y="3566160"/>
+            <a:ext cx="2651760" cy="1005840"/>
+          </a:xfrm>
+          <a:prstGeom prst="rect">
+            <a:avLst/>
+          </a:prstGeom>
+          <a:noFill/>
+          <a:ln/>
+        </p:spPr>
+        <p:txBody>
+          <a:bodyPr wrap="square" lIns="0" tIns="0" rIns="0" bIns="0" rtlCol="0" anchor="t"/>
+          <a:lstStyle/>
+          <a:p>
+            <a:pPr indent="0" marL="0">
+              <a:buNone/>
+            </a:pPr>
+            <a:r>
+              <a:rPr lang="en-US" sz="1500" dirty="0">
+                <a:solidFill>
+                  <a:srgbClr val="B3AA9E"/>
+                </a:solidFill>
+                <a:latin typeface="Satoshi" pitchFamily="34" charset="0"/>
+                <a:ea typeface="Satoshi" pitchFamily="34" charset="-122"/>
+                <a:cs typeface="Satoshi" pitchFamily="34" charset="-120"/>
+              </a:rPr>
+              <a:t>Looks great, but every chart and layout is made by hand.</a:t>
+            </a:r>
+            <a:endParaRPr lang="en-US" sz="1500" dirty="0"/>
+          </a:p>
+        </p:txBody>
+      </p:sp>
+      <p:sp>
+        <p:nvSpPr>
+          <p:cNvPr id="12" name="Shape 8"/>
+          <p:cNvSpPr/>
+          <p:nvPr/>
+        </p:nvSpPr>
+        <p:spPr>
+          <a:xfrm>
+            <a:off x="4206240" y="1874520"/>
+            <a:ext cx="3776472" cy="3200400"/>
+          </a:xfrm>
+          <a:prstGeom prst="roundRect">
+            <a:avLst>
+              <a:gd name="adj" fmla="val 4571"/>
+            </a:avLst>
+          </a:prstGeom>
+          <a:solidFill>
+            <a:srgbClr val="FFFFFF">
+              <a:alpha val="18000"/>
+            </a:srgbClr>
+          </a:solidFill>
+          <a:ln w="12700">
+            <a:solidFill>
+              <a:srgbClr val="FFFFFF">
+                <a:alpha val="32000"/>
+              </a:srgbClr>
+            </a:solidFill>
+            <a:prstDash val="solid"/>
+          </a:ln>
+          <a:effectLst>
+            <a:outerShdw sx="100000" sy="100000" kx="0" ky="0" algn="bl" rotWithShape="0" blurRad="228600" dist="76200" dir="5400000">
+              <a:srgbClr val="000000">
+                <a:alpha val="40000"/>
+              </a:srgbClr>
+            </a:outerShdw>
+          </a:effectLst>
+        </p:spPr>
+      </p:sp>
+      <p:sp>
+        <p:nvSpPr>
+          <p:cNvPr id="13" name="Text 9"/>
+          <p:cNvSpPr/>
+          <p:nvPr/>
+        </p:nvSpPr>
+        <p:spPr>
+          <a:xfrm>
+            <a:off x="4526280" y="2194560"/>
+            <a:ext cx="3291840" cy="363220"/>
+          </a:xfrm>
+          <a:prstGeom prst="rect">
+            <a:avLst/>
+          </a:prstGeom>
+          <a:noFill/>
+          <a:ln/>
+        </p:spPr>
+        <p:txBody>
+          <a:bodyPr wrap="square" lIns="0" tIns="0" rIns="0" bIns="0" rtlCol="0" anchor="ctr"/>
+          <a:lstStyle/>
+          <a:p>
+            <a:pPr algn="l" indent="0" marL="0">
+              <a:buNone/>
+            </a:pPr>
+            <a:r>
+              <a:rPr lang="en-US" sz="2200" spc="748" kern="0" dirty="0">
+                <a:solidFill>
+                  <a:srgbClr val="C9A227"/>
+                </a:solidFill>
+                <a:latin typeface="Baskervville" pitchFamily="34" charset="0"/>
+                <a:ea typeface="Baskervville" pitchFamily="34" charset="-122"/>
+                <a:cs typeface="Baskervville" pitchFamily="34" charset="-120"/>
+              </a:rPr>
+              <a:t>COMPOSE</a:t>
+            </a:r>
+            <a:endParaRPr lang="en-US" sz="2200" dirty="0"/>
+          </a:p>
+        </p:txBody>
+      </p:sp>
+      <p:sp>
+        <p:nvSpPr>
+          <p:cNvPr id="14" name="Text 10"/>
+          <p:cNvSpPr/>
+          <p:nvPr/>
+        </p:nvSpPr>
+        <p:spPr>
+          <a:xfrm>
+            <a:off x="4526280" y="2880360"/>
+            <a:ext cx="3154680" cy="1737360"/>
+          </a:xfrm>
+          <a:prstGeom prst="rect">
+            <a:avLst/>
+          </a:prstGeom>
+          <a:noFill/>
+          <a:ln/>
+        </p:spPr>
+        <p:txBody>
+          <a:bodyPr wrap="square" lIns="0" tIns="0" rIns="0" bIns="0" rtlCol="0" anchor="t"/>
+          <a:lstStyle/>
+          <a:p>
+            <a:pPr indent="0" marL="0">
+              <a:lnSpc>
+                <a:spcPct val="105000"/>
+              </a:lnSpc>
+              <a:buNone/>
+            </a:pPr>
+            <a:r>
+              <a:rPr lang="en-US" sz="1900" b="1" dirty="0">
+                <a:solidFill>
+                  <a:srgbClr val="F2EFE9"/>
+                </a:solidFill>
+                <a:latin typeface="Baskervville" pitchFamily="34" charset="0"/>
+                <a:ea typeface="Baskervville" pitchFamily="34" charset="-122"/>
+                <a:cs typeface="Baskervville" pitchFamily="34" charset="-120"/>
+              </a:rPr>
+              <a:t>Write like in Word. Get a designed document like Canva, automatically.</a:t>
+            </a:r>
+            <a:endParaRPr lang="en-US" sz="1900" dirty="0"/>
+          </a:p>
+        </p:txBody>
+      </p:sp>
+      <p:sp>
+        <p:nvSpPr>
+          <p:cNvPr id="15" name="Shape 11"/>
+          <p:cNvSpPr/>
+          <p:nvPr/>
+        </p:nvSpPr>
+        <p:spPr>
+          <a:xfrm>
+            <a:off x="640080" y="5440680"/>
+            <a:ext cx="10908792" cy="0"/>
+          </a:xfrm>
+          <a:prstGeom prst="line">
+            <a:avLst/>
+          </a:prstGeom>
+          <a:noFill/>
+          <a:ln w="31750">
+            <a:solidFill>
+              <a:srgbClr val="F2EFE9"/>
+            </a:solidFill>
+            <a:prstDash val="solid"/>
+          </a:ln>
+        </p:spPr>
+      </p:sp>
+      <p:sp>
+        <p:nvSpPr>
+          <p:cNvPr id="16" name="Shape 12"/>
+          <p:cNvSpPr/>
+          <p:nvPr/>
+        </p:nvSpPr>
+        <p:spPr>
+          <a:xfrm>
+            <a:off x="640080" y="5330952"/>
+            <a:ext cx="219456" cy="219456"/>
+          </a:xfrm>
+          <a:prstGeom prst="rect">
+            <a:avLst/>
+          </a:prstGeom>
+          <a:solidFill>
+            <a:srgbClr val="2554E8"/>
+          </a:solidFill>
+          <a:ln/>
+        </p:spPr>
+      </p:sp>
+      <p:sp>
+        <p:nvSpPr>
+          <p:cNvPr id="17" name="Shape 13"/>
+          <p:cNvSpPr/>
+          <p:nvPr/>
+        </p:nvSpPr>
+        <p:spPr>
+          <a:xfrm>
+            <a:off x="5952744" y="5303520"/>
+            <a:ext cx="274320" cy="274320"/>
+          </a:xfrm>
+          <a:prstGeom prst="ellipse">
+            <a:avLst/>
+          </a:prstGeom>
+          <a:solidFill>
+            <a:srgbClr val="C0392B"/>
+          </a:solidFill>
+          <a:ln/>
+        </p:spPr>
+      </p:sp>
+      <p:sp>
+        <p:nvSpPr>
+          <p:cNvPr id="18" name="Shape 14"/>
+          <p:cNvSpPr/>
+          <p:nvPr/>
+        </p:nvSpPr>
+        <p:spPr>
+          <a:xfrm>
+            <a:off x="11311128" y="5321808"/>
+            <a:ext cx="246888" cy="222199"/>
+          </a:xfrm>
+          <a:prstGeom prst="triangle">
+            <a:avLst/>
+          </a:prstGeom>
+          <a:solidFill>
+            <a:srgbClr val="C9A227"/>
+          </a:solidFill>
+          <a:ln/>
+        </p:spPr>
+      </p:sp>
+      <p:sp>
+        <p:nvSpPr>
+          <p:cNvPr id="19" name="Text 15"/>
+          <p:cNvSpPr/>
+          <p:nvPr/>
+        </p:nvSpPr>
+        <p:spPr>
+          <a:xfrm>
+            <a:off x="640080" y="5623560"/>
+            <a:ext cx="3291840" cy="274320"/>
+          </a:xfrm>
+          <a:prstGeom prst="rect">
+            <a:avLst/>
+          </a:prstGeom>
+          <a:noFill/>
+          <a:ln/>
+        </p:spPr>
+        <p:txBody>
+          <a:bodyPr wrap="square" lIns="0" tIns="0" rIns="0" bIns="0" rtlCol="0" anchor="t"/>
+          <a:lstStyle/>
+          <a:p>
+            <a:pPr indent="0" marL="0">
+              <a:buNone/>
+            </a:pPr>
+            <a:r>
+              <a:rPr lang="en-US" sz="1100" spc="300" kern="0" dirty="0">
+                <a:solidFill>
+                  <a:srgbClr val="F2EFE9"/>
+                </a:solidFill>
+                <a:latin typeface="Roboto Mono" pitchFamily="34" charset="0"/>
+                <a:ea typeface="Roboto Mono" pitchFamily="34" charset="-122"/>
+                <a:cs typeface="Roboto Mono" pitchFamily="34" charset="-120"/>
+              </a:rPr>
+              <a:t>EASY TO WRITE</a:t>
+            </a:r>
+            <a:endParaRPr lang="en-US" sz="1100" dirty="0"/>
+          </a:p>
+        </p:txBody>
+      </p:sp>
+      <p:sp>
+        <p:nvSpPr>
+          <p:cNvPr id="20" name="Text 16"/>
+          <p:cNvSpPr/>
+          <p:nvPr/>
+        </p:nvSpPr>
+        <p:spPr>
+          <a:xfrm>
+            <a:off x="4206240" y="5623560"/>
+            <a:ext cx="3776472" cy="274320"/>
+          </a:xfrm>
+          <a:prstGeom prst="rect">
+            <a:avLst/>
+          </a:prstGeom>
+          <a:noFill/>
+          <a:ln/>
+        </p:spPr>
+        <p:txBody>
+          <a:bodyPr wrap="square" lIns="0" tIns="0" rIns="0" bIns="0" rtlCol="0" anchor="t"/>
+          <a:lstStyle/>
+          <a:p>
+            <a:pPr algn="ctr" indent="0" marL="0">
+              <a:buNone/>
+            </a:pPr>
+            <a:r>
+              <a:rPr lang="en-US" sz="1100" spc="300" kern="0" dirty="0">
+                <a:solidFill>
+                  <a:srgbClr val="C0392B"/>
+                </a:solidFill>
+                <a:latin typeface="Roboto Mono" pitchFamily="34" charset="0"/>
+                <a:ea typeface="Roboto Mono" pitchFamily="34" charset="-122"/>
+                <a:cs typeface="Roboto Mono" pitchFamily="34" charset="-120"/>
+              </a:rPr>
+              <a:t>BOTH</a:t>
+            </a:r>
+            <a:endParaRPr lang="en-US" sz="1100" dirty="0"/>
+          </a:p>
+        </p:txBody>
+      </p:sp>
+      <p:sp>
+        <p:nvSpPr>
+          <p:cNvPr id="21" name="Text 17"/>
+          <p:cNvSpPr/>
+          <p:nvPr/>
+        </p:nvSpPr>
+        <p:spPr>
+          <a:xfrm>
+            <a:off x="8257032" y="5623560"/>
+            <a:ext cx="3291840" cy="274320"/>
+          </a:xfrm>
+          <a:prstGeom prst="rect">
+            <a:avLst/>
+          </a:prstGeom>
+          <a:noFill/>
+          <a:ln/>
+        </p:spPr>
+        <p:txBody>
+          <a:bodyPr wrap="square" lIns="0" tIns="0" rIns="0" bIns="0" rtlCol="0" anchor="t"/>
+          <a:lstStyle/>
+          <a:p>
+            <a:pPr algn="r" indent="0" marL="0">
+              <a:buNone/>
+            </a:pPr>
+            <a:r>
+              <a:rPr lang="en-US" sz="1100" spc="300" kern="0" dirty="0">
+                <a:solidFill>
+                  <a:srgbClr val="F2EFE9"/>
+                </a:solidFill>
+                <a:latin typeface="Roboto Mono" pitchFamily="34" charset="0"/>
+                <a:ea typeface="Roboto Mono" pitchFamily="34" charset="-122"/>
+                <a:cs typeface="Roboto Mono" pitchFamily="34" charset="-120"/>
+              </a:rPr>
+              <a:t>DESIGNED TO READ</a:t>
+            </a:r>
+            <a:endParaRPr lang="en-US" sz="1100" dirty="0"/>
+          </a:p>
+        </p:txBody>
+      </p:sp>
+      <p:sp>
+        <p:nvSpPr>
+          <p:cNvPr id="22" name="Text 18"/>
+          <p:cNvSpPr/>
+          <p:nvPr/>
+        </p:nvSpPr>
+        <p:spPr>
+          <a:xfrm>
+            <a:off x="640080" y="6199632"/>
+            <a:ext cx="2743200" cy="214630"/>
+          </a:xfrm>
+          <a:prstGeom prst="rect">
+            <a:avLst/>
+          </a:prstGeom>
+          <a:noFill/>
+          <a:ln/>
+        </p:spPr>
+        <p:txBody>
+          <a:bodyPr wrap="square" lIns="0" tIns="0" rIns="0" bIns="0" rtlCol="0" anchor="ctr"/>
+          <a:lstStyle/>
+          <a:p>
+            <a:pPr algn="l" indent="0" marL="0">
+              <a:buNone/>
+            </a:pPr>
+            <a:r>
+              <a:rPr lang="en-US" sz="1300" spc="442" kern="0" dirty="0">
+                <a:solidFill>
+                  <a:srgbClr val="C9A227"/>
+                </a:solidFill>
+                <a:latin typeface="Baskervville" pitchFamily="34" charset="0"/>
+                <a:ea typeface="Baskervville" pitchFamily="34" charset="-122"/>
+                <a:cs typeface="Baskervville" pitchFamily="34" charset="-120"/>
+              </a:rPr>
+              <a:t>COMPOSE</a:t>
+            </a:r>
+            <a:endParaRPr lang="en-US" sz="1300" dirty="0"/>
+          </a:p>
+        </p:txBody>
+      </p:sp>
+      <p:sp>
+        <p:nvSpPr>
+          <p:cNvPr id="23" name="Text 19"/>
           <p:cNvSpPr/>
           <p:nvPr/>
         </p:nvSpPr>
@@ -2380,7 +2418,7 @@
             <a:r>
               <a:rPr lang="en-US" sz="1100" dirty="0">
                 <a:solidFill>
-                  <a:srgbClr val="5E5A54"/>
+                  <a:srgbClr val="8A8177"/>
                 </a:solidFill>
                 <a:latin typeface="Roboto Mono" pitchFamily="34" charset="0"/>
                 <a:ea typeface="Roboto Mono" pitchFamily="34" charset="-122"/>
@@ -2406,7 +2444,7 @@
     <p:bg>
       <p:bgPr>
         <a:solidFill>
-          <a:srgbClr val="F7F6F2"/>
+          <a:srgbClr val="1A1613"/>
         </a:solidFill>
       </p:bgPr>
     </p:bg>
@@ -2494,7 +2532,7 @@
             <a:r>
               <a:rPr lang="en-US" sz="3400" b="1" dirty="0">
                 <a:solidFill>
-                  <a:srgbClr val="1E1E1E"/>
+                  <a:srgbClr val="F2EFE9"/>
                 </a:solidFill>
                 <a:latin typeface="Baskervville" pitchFamily="34" charset="0"/>
                 <a:ea typeface="Baskervville" pitchFamily="34" charset="-122"/>
@@ -2514,7 +2552,7 @@
             <a:r>
               <a:rPr lang="en-US" sz="3400" b="1" dirty="0">
                 <a:solidFill>
-                  <a:srgbClr val="1E1E1E"/>
+                  <a:srgbClr val="F2EFE9"/>
                 </a:solidFill>
                 <a:latin typeface="Baskervville" pitchFamily="34" charset="0"/>
                 <a:ea typeface="Baskervville" pitchFamily="34" charset="-122"/>
@@ -2544,21 +2582,21 @@
           </a:prstGeom>
           <a:solidFill>
             <a:srgbClr val="FFFFFF">
-              <a:alpha val="58000"/>
+              <a:alpha val="12000"/>
             </a:srgbClr>
           </a:solidFill>
-          <a:ln w="19050">
+          <a:ln w="12700">
             <a:solidFill>
               <a:srgbClr val="FFFFFF">
-                <a:alpha val="90000"/>
+                <a:alpha val="32000"/>
               </a:srgbClr>
             </a:solidFill>
             <a:prstDash val="solid"/>
           </a:ln>
           <a:effectLst>
-            <a:outerShdw sx="100000" sy="100000" kx="0" ky="0" algn="bl" rotWithShape="0" blurRad="203200" dist="63500" dir="5400000">
+            <a:outerShdw sx="100000" sy="100000" kx="0" ky="0" algn="bl" rotWithShape="0" blurRad="228600" dist="76200" dir="5400000">
               <a:srgbClr val="000000">
-                <a:alpha val="14000"/>
+                <a:alpha val="40000"/>
               </a:srgbClr>
             </a:outerShdw>
           </a:effectLst>
@@ -2650,7 +2688,7 @@
             <a:r>
               <a:rPr lang="en-US" sz="2200" b="1" dirty="0">
                 <a:solidFill>
-                  <a:srgbClr val="1E1E1E"/>
+                  <a:srgbClr val="F2EFE9"/>
                 </a:solidFill>
                 <a:latin typeface="Baskervville" pitchFamily="34" charset="0"/>
                 <a:ea typeface="Baskervville" pitchFamily="34" charset="-122"/>
@@ -2689,7 +2727,7 @@
             <a:r>
               <a:rPr lang="en-US" sz="1500" dirty="0">
                 <a:solidFill>
-                  <a:srgbClr val="5E5A54"/>
+                  <a:srgbClr val="B3AA9E"/>
                 </a:solidFill>
                 <a:latin typeface="Satoshi" pitchFamily="34" charset="0"/>
                 <a:ea typeface="Satoshi" pitchFamily="34" charset="-122"/>
@@ -2719,21 +2757,21 @@
           </a:prstGeom>
           <a:solidFill>
             <a:srgbClr val="FFFFFF">
-              <a:alpha val="58000"/>
+              <a:alpha val="12000"/>
             </a:srgbClr>
           </a:solidFill>
-          <a:ln w="19050">
+          <a:ln w="12700">
             <a:solidFill>
               <a:srgbClr val="FFFFFF">
-                <a:alpha val="90000"/>
+                <a:alpha val="32000"/>
               </a:srgbClr>
             </a:solidFill>
             <a:prstDash val="solid"/>
           </a:ln>
           <a:effectLst>
-            <a:outerShdw sx="100000" sy="100000" kx="0" ky="0" algn="bl" rotWithShape="0" blurRad="203200" dist="63500" dir="5400000">
+            <a:outerShdw sx="100000" sy="100000" kx="0" ky="0" algn="bl" rotWithShape="0" blurRad="228600" dist="76200" dir="5400000">
               <a:srgbClr val="000000">
-                <a:alpha val="14000"/>
+                <a:alpha val="40000"/>
               </a:srgbClr>
             </a:outerShdw>
           </a:effectLst>
@@ -2786,7 +2824,7 @@
             <a:r>
               <a:rPr lang="en-US" sz="4200" b="1" dirty="0">
                 <a:solidFill>
-                  <a:srgbClr val="1E1E1E"/>
+                  <a:srgbClr val="1A1613"/>
                 </a:solidFill>
                 <a:latin typeface="Baskervville" pitchFamily="34" charset="0"/>
                 <a:ea typeface="Baskervville" pitchFamily="34" charset="-122"/>
@@ -2825,7 +2863,7 @@
             <a:r>
               <a:rPr lang="en-US" sz="2200" b="1" dirty="0">
                 <a:solidFill>
-                  <a:srgbClr val="1E1E1E"/>
+                  <a:srgbClr val="F2EFE9"/>
                 </a:solidFill>
                 <a:latin typeface="Baskervville" pitchFamily="34" charset="0"/>
                 <a:ea typeface="Baskervville" pitchFamily="34" charset="-122"/>
@@ -2864,7 +2902,7 @@
             <a:r>
               <a:rPr lang="en-US" sz="1500" dirty="0">
                 <a:solidFill>
-                  <a:srgbClr val="5E5A54"/>
+                  <a:srgbClr val="B3AA9E"/>
                 </a:solidFill>
                 <a:latin typeface="Satoshi" pitchFamily="34" charset="0"/>
                 <a:ea typeface="Satoshi" pitchFamily="34" charset="-122"/>
@@ -2894,21 +2932,21 @@
           </a:prstGeom>
           <a:solidFill>
             <a:srgbClr val="FFFFFF">
-              <a:alpha val="58000"/>
+              <a:alpha val="12000"/>
             </a:srgbClr>
           </a:solidFill>
-          <a:ln w="19050">
+          <a:ln w="12700">
             <a:solidFill>
               <a:srgbClr val="FFFFFF">
-                <a:alpha val="90000"/>
+                <a:alpha val="32000"/>
               </a:srgbClr>
             </a:solidFill>
             <a:prstDash val="solid"/>
           </a:ln>
           <a:effectLst>
-            <a:outerShdw sx="100000" sy="100000" kx="0" ky="0" algn="bl" rotWithShape="0" blurRad="203200" dist="63500" dir="5400000">
+            <a:outerShdw sx="100000" sy="100000" kx="0" ky="0" algn="bl" rotWithShape="0" blurRad="228600" dist="76200" dir="5400000">
               <a:srgbClr val="000000">
-                <a:alpha val="14000"/>
+                <a:alpha val="40000"/>
               </a:srgbClr>
             </a:outerShdw>
           </a:effectLst>
@@ -3000,7 +3038,7 @@
             <a:r>
               <a:rPr lang="en-US" sz="2200" b="1" dirty="0">
                 <a:solidFill>
-                  <a:srgbClr val="1E1E1E"/>
+                  <a:srgbClr val="F2EFE9"/>
                 </a:solidFill>
                 <a:latin typeface="Baskervville" pitchFamily="34" charset="0"/>
                 <a:ea typeface="Baskervville" pitchFamily="34" charset="-122"/>
@@ -3039,7 +3077,7 @@
             <a:r>
               <a:rPr lang="en-US" sz="1500" dirty="0">
                 <a:solidFill>
-                  <a:srgbClr val="5E5A54"/>
+                  <a:srgbClr val="B3AA9E"/>
                 </a:solidFill>
                 <a:latin typeface="Satoshi" pitchFamily="34" charset="0"/>
                 <a:ea typeface="Satoshi" pitchFamily="34" charset="-122"/>
@@ -3051,33 +3089,48 @@
           </a:p>
         </p:txBody>
       </p:sp>
-      <p:pic>
-        <p:nvPicPr>
-          <p:cNvPr id="20" name="Image 0" descr="/private/tmp/claude-501/-Users-shazzadul-Documents-Projects-AI-Hackathon/897b972a-c7fd-436b-8660-8d0ac214ab10/scratchpad/deck/logo.png">    </p:cNvPr>
-          <p:cNvPicPr>
-            <a:picLocks noChangeAspect="1"/>
-          </p:cNvPicPr>
-          <p:nvPr/>
-        </p:nvPicPr>
-        <p:blipFill>
-          <a:blip r:embed="rId1"/>
-          <a:stretch>
-            <a:fillRect/>
-          </a:stretch>
-        </p:blipFill>
-        <p:spPr>
-          <a:xfrm>
-            <a:off x="640080" y="6236208"/>
-            <a:ext cx="1051560" cy="275183"/>
-          </a:xfrm>
-          <a:prstGeom prst="rect">
-            <a:avLst/>
-          </a:prstGeom>
-        </p:spPr>
-      </p:pic>
-      <p:sp>
-        <p:nvSpPr>
-          <p:cNvPr id="21" name="Text 18"/>
+      <p:sp>
+        <p:nvSpPr>
+          <p:cNvPr id="20" name="Text 18"/>
+          <p:cNvSpPr/>
+          <p:nvPr/>
+        </p:nvSpPr>
+        <p:spPr>
+          <a:xfrm>
+            <a:off x="640080" y="6199632"/>
+            <a:ext cx="2743200" cy="214630"/>
+          </a:xfrm>
+          <a:prstGeom prst="rect">
+            <a:avLst/>
+          </a:prstGeom>
+          <a:noFill/>
+          <a:ln/>
+        </p:spPr>
+        <p:txBody>
+          <a:bodyPr wrap="square" lIns="0" tIns="0" rIns="0" bIns="0" rtlCol="0" anchor="ctr"/>
+          <a:lstStyle/>
+          <a:p>
+            <a:pPr algn="l" indent="0" marL="0">
+              <a:buNone/>
+            </a:pPr>
+            <a:r>
+              <a:rPr lang="en-US" sz="1300" spc="442" kern="0" dirty="0">
+                <a:solidFill>
+                  <a:srgbClr val="C9A227"/>
+                </a:solidFill>
+                <a:latin typeface="Baskervville" pitchFamily="34" charset="0"/>
+                <a:ea typeface="Baskervville" pitchFamily="34" charset="-122"/>
+                <a:cs typeface="Baskervville" pitchFamily="34" charset="-120"/>
+              </a:rPr>
+              <a:t>COMPOSE</a:t>
+            </a:r>
+            <a:endParaRPr lang="en-US" sz="1300" dirty="0"/>
+          </a:p>
+        </p:txBody>
+      </p:sp>
+      <p:sp>
+        <p:nvSpPr>
+          <p:cNvPr id="21" name="Text 19"/>
           <p:cNvSpPr/>
           <p:nvPr/>
         </p:nvSpPr>
@@ -3102,7 +3155,7 @@
             <a:r>
               <a:rPr lang="en-US" sz="1100" dirty="0">
                 <a:solidFill>
-                  <a:srgbClr val="5E5A54"/>
+                  <a:srgbClr val="8A8177"/>
                 </a:solidFill>
                 <a:latin typeface="Roboto Mono" pitchFamily="34" charset="0"/>
                 <a:ea typeface="Roboto Mono" pitchFamily="34" charset="-122"/>
@@ -3128,7 +3181,7 @@
     <p:bg>
       <p:bgPr>
         <a:solidFill>
-          <a:srgbClr val="F7F6F2"/>
+          <a:srgbClr val="1A1613"/>
         </a:solidFill>
       </p:bgPr>
     </p:bg>
@@ -3216,7 +3269,7 @@
             <a:r>
               <a:rPr lang="en-US" sz="3400" b="1" dirty="0">
                 <a:solidFill>
-                  <a:srgbClr val="1E1E1E"/>
+                  <a:srgbClr val="F2EFE9"/>
                 </a:solidFill>
                 <a:latin typeface="Baskervville" pitchFamily="34" charset="0"/>
                 <a:ea typeface="Baskervville" pitchFamily="34" charset="-122"/>
@@ -3246,21 +3299,21 @@
           </a:prstGeom>
           <a:solidFill>
             <a:srgbClr val="FFFFFF">
-              <a:alpha val="58000"/>
+              <a:alpha val="12000"/>
             </a:srgbClr>
           </a:solidFill>
-          <a:ln w="19050">
+          <a:ln w="12700">
             <a:solidFill>
               <a:srgbClr val="FFFFFF">
-                <a:alpha val="90000"/>
+                <a:alpha val="32000"/>
               </a:srgbClr>
             </a:solidFill>
             <a:prstDash val="solid"/>
           </a:ln>
           <a:effectLst>
-            <a:outerShdw sx="100000" sy="100000" kx="0" ky="0" algn="bl" rotWithShape="0" blurRad="203200" dist="63500" dir="5400000">
+            <a:outerShdw sx="100000" sy="100000" kx="0" ky="0" algn="bl" rotWithShape="0" blurRad="228600" dist="76200" dir="5400000">
               <a:srgbClr val="000000">
-                <a:alpha val="14000"/>
+                <a:alpha val="40000"/>
               </a:srgbClr>
             </a:outerShdw>
           </a:effectLst>
@@ -3281,7 +3334,7 @@
             <a:avLst/>
           </a:prstGeom>
           <a:solidFill>
-            <a:srgbClr val="1E1E1E"/>
+            <a:srgbClr val="0E0C0A"/>
           </a:solidFill>
           <a:ln/>
         </p:spPr>
@@ -3345,33 +3398,48 @@
           </a:p>
         </p:txBody>
       </p:sp>
-      <p:pic>
-        <p:nvPicPr>
-          <p:cNvPr id="9" name="Image 0" descr="/private/tmp/claude-501/-Users-shazzadul-Documents-Projects-AI-Hackathon/897b972a-c7fd-436b-8660-8d0ac214ab10/scratchpad/deck/logo.png">    </p:cNvPr>
-          <p:cNvPicPr>
-            <a:picLocks noChangeAspect="1"/>
-          </p:cNvPicPr>
-          <p:nvPr/>
-        </p:nvPicPr>
-        <p:blipFill>
-          <a:blip r:embed="rId1"/>
-          <a:stretch>
-            <a:fillRect/>
-          </a:stretch>
-        </p:blipFill>
-        <p:spPr>
-          <a:xfrm>
-            <a:off x="640080" y="6236208"/>
-            <a:ext cx="1051560" cy="275183"/>
-          </a:xfrm>
-          <a:prstGeom prst="rect">
-            <a:avLst/>
-          </a:prstGeom>
-        </p:spPr>
-      </p:pic>
-      <p:sp>
-        <p:nvSpPr>
-          <p:cNvPr id="10" name="Text 7"/>
+      <p:sp>
+        <p:nvSpPr>
+          <p:cNvPr id="9" name="Text 7"/>
+          <p:cNvSpPr/>
+          <p:nvPr/>
+        </p:nvSpPr>
+        <p:spPr>
+          <a:xfrm>
+            <a:off x="640080" y="6199632"/>
+            <a:ext cx="2743200" cy="214630"/>
+          </a:xfrm>
+          <a:prstGeom prst="rect">
+            <a:avLst/>
+          </a:prstGeom>
+          <a:noFill/>
+          <a:ln/>
+        </p:spPr>
+        <p:txBody>
+          <a:bodyPr wrap="square" lIns="0" tIns="0" rIns="0" bIns="0" rtlCol="0" anchor="ctr"/>
+          <a:lstStyle/>
+          <a:p>
+            <a:pPr algn="l" indent="0" marL="0">
+              <a:buNone/>
+            </a:pPr>
+            <a:r>
+              <a:rPr lang="en-US" sz="1300" spc="442" kern="0" dirty="0">
+                <a:solidFill>
+                  <a:srgbClr val="C9A227"/>
+                </a:solidFill>
+                <a:latin typeface="Baskervville" pitchFamily="34" charset="0"/>
+                <a:ea typeface="Baskervville" pitchFamily="34" charset="-122"/>
+                <a:cs typeface="Baskervville" pitchFamily="34" charset="-120"/>
+              </a:rPr>
+              <a:t>COMPOSE</a:t>
+            </a:r>
+            <a:endParaRPr lang="en-US" sz="1300" dirty="0"/>
+          </a:p>
+        </p:txBody>
+      </p:sp>
+      <p:sp>
+        <p:nvSpPr>
+          <p:cNvPr id="10" name="Text 8"/>
           <p:cNvSpPr/>
           <p:nvPr/>
         </p:nvSpPr>
@@ -3396,7 +3464,7 @@
             <a:r>
               <a:rPr lang="en-US" sz="1100" dirty="0">
                 <a:solidFill>
-                  <a:srgbClr val="5E5A54"/>
+                  <a:srgbClr val="8A8177"/>
                 </a:solidFill>
                 <a:latin typeface="Roboto Mono" pitchFamily="34" charset="0"/>
                 <a:ea typeface="Roboto Mono" pitchFamily="34" charset="-122"/>
@@ -3422,7 +3490,7 @@
     <p:bg>
       <p:bgPr>
         <a:solidFill>
-          <a:srgbClr val="F7F6F2"/>
+          <a:srgbClr val="1A1613"/>
         </a:solidFill>
       </p:bgPr>
     </p:bg>
@@ -3455,7 +3523,7 @@
             <a:avLst/>
           </a:prstGeom>
           <a:solidFill>
-            <a:srgbClr val="1E1E1E"/>
+            <a:srgbClr val="F2EFE9"/>
           </a:solidFill>
           <a:ln/>
         </p:spPr>
@@ -3490,7 +3558,7 @@
             <a:r>
               <a:rPr lang="en-US" sz="3400" b="1" dirty="0">
                 <a:solidFill>
-                  <a:srgbClr val="1E1E1E"/>
+                  <a:srgbClr val="F2EFE9"/>
                 </a:solidFill>
                 <a:latin typeface="Baskervville" pitchFamily="34" charset="0"/>
                 <a:ea typeface="Baskervville" pitchFamily="34" charset="-122"/>
@@ -3520,21 +3588,21 @@
           </a:prstGeom>
           <a:solidFill>
             <a:srgbClr val="FFFFFF">
-              <a:alpha val="58000"/>
+              <a:alpha val="12000"/>
             </a:srgbClr>
           </a:solidFill>
-          <a:ln w="19050">
+          <a:ln w="12700">
             <a:solidFill>
               <a:srgbClr val="FFFFFF">
-                <a:alpha val="90000"/>
+                <a:alpha val="32000"/>
               </a:srgbClr>
             </a:solidFill>
             <a:prstDash val="solid"/>
           </a:ln>
           <a:effectLst>
-            <a:outerShdw sx="100000" sy="100000" kx="0" ky="0" algn="bl" rotWithShape="0" blurRad="203200" dist="63500" dir="5400000">
+            <a:outerShdw sx="100000" sy="100000" kx="0" ky="0" algn="bl" rotWithShape="0" blurRad="228600" dist="76200" dir="5400000">
               <a:srgbClr val="000000">
-                <a:alpha val="14000"/>
+                <a:alpha val="40000"/>
               </a:srgbClr>
             </a:outerShdw>
           </a:effectLst>
@@ -3626,7 +3694,7 @@
             <a:r>
               <a:rPr lang="en-US" sz="2200" b="1" dirty="0">
                 <a:solidFill>
-                  <a:srgbClr val="1E1E1E"/>
+                  <a:srgbClr val="F2EFE9"/>
                 </a:solidFill>
                 <a:latin typeface="Baskervville" pitchFamily="34" charset="0"/>
                 <a:ea typeface="Baskervville" pitchFamily="34" charset="-122"/>
@@ -3665,7 +3733,7 @@
             <a:r>
               <a:rPr lang="en-US" sz="1500" dirty="0">
                 <a:solidFill>
-                  <a:srgbClr val="5E5A54"/>
+                  <a:srgbClr val="B3AA9E"/>
                 </a:solidFill>
                 <a:latin typeface="Satoshi" pitchFamily="34" charset="0"/>
                 <a:ea typeface="Satoshi" pitchFamily="34" charset="-122"/>
@@ -3763,7 +3831,7 @@
             <a:r>
               <a:rPr lang="en-US" sz="2200" b="1" dirty="0">
                 <a:solidFill>
-                  <a:srgbClr val="1E1E1E"/>
+                  <a:srgbClr val="F2EFE9"/>
                 </a:solidFill>
                 <a:latin typeface="Baskervville" pitchFamily="34" charset="0"/>
                 <a:ea typeface="Baskervville" pitchFamily="34" charset="-122"/>
@@ -3802,7 +3870,7 @@
             <a:r>
               <a:rPr lang="en-US" sz="1500" dirty="0">
                 <a:solidFill>
-                  <a:srgbClr val="5E5A54"/>
+                  <a:srgbClr val="B3AA9E"/>
                 </a:solidFill>
                 <a:latin typeface="Satoshi" pitchFamily="34" charset="0"/>
                 <a:ea typeface="Satoshi" pitchFamily="34" charset="-122"/>
@@ -3861,7 +3929,7 @@
             <a:r>
               <a:rPr lang="en-US" sz="5400" b="1" dirty="0">
                 <a:solidFill>
-                  <a:srgbClr val="1E1E1E"/>
+                  <a:srgbClr val="1A1613"/>
                 </a:solidFill>
                 <a:latin typeface="Baskervville" pitchFamily="34" charset="0"/>
                 <a:ea typeface="Baskervville" pitchFamily="34" charset="-122"/>
@@ -3900,7 +3968,7 @@
             <a:r>
               <a:rPr lang="en-US" sz="2200" b="1" dirty="0">
                 <a:solidFill>
-                  <a:srgbClr val="1E1E1E"/>
+                  <a:srgbClr val="F2EFE9"/>
                 </a:solidFill>
                 <a:latin typeface="Baskervville" pitchFamily="34" charset="0"/>
                 <a:ea typeface="Baskervville" pitchFamily="34" charset="-122"/>
@@ -3939,7 +4007,7 @@
             <a:r>
               <a:rPr lang="en-US" sz="1500" dirty="0">
                 <a:solidFill>
-                  <a:srgbClr val="5E5A54"/>
+                  <a:srgbClr val="B3AA9E"/>
                 </a:solidFill>
                 <a:latin typeface="Satoshi" pitchFamily="34" charset="0"/>
                 <a:ea typeface="Satoshi" pitchFamily="34" charset="-122"/>
@@ -3951,33 +4019,48 @@
           </a:p>
         </p:txBody>
       </p:sp>
-      <p:pic>
-        <p:nvPicPr>
-          <p:cNvPr id="17" name="Image 0" descr="/private/tmp/claude-501/-Users-shazzadul-Documents-Projects-AI-Hackathon/897b972a-c7fd-436b-8660-8d0ac214ab10/scratchpad/deck/logo.png">    </p:cNvPr>
-          <p:cNvPicPr>
-            <a:picLocks noChangeAspect="1"/>
-          </p:cNvPicPr>
-          <p:nvPr/>
-        </p:nvPicPr>
-        <p:blipFill>
-          <a:blip r:embed="rId1"/>
-          <a:stretch>
-            <a:fillRect/>
-          </a:stretch>
-        </p:blipFill>
-        <p:spPr>
-          <a:xfrm>
-            <a:off x="640080" y="6236208"/>
-            <a:ext cx="1051560" cy="275183"/>
-          </a:xfrm>
-          <a:prstGeom prst="rect">
-            <a:avLst/>
-          </a:prstGeom>
-        </p:spPr>
-      </p:pic>
-      <p:sp>
-        <p:nvSpPr>
-          <p:cNvPr id="18" name="Text 15"/>
+      <p:sp>
+        <p:nvSpPr>
+          <p:cNvPr id="17" name="Text 15"/>
+          <p:cNvSpPr/>
+          <p:nvPr/>
+        </p:nvSpPr>
+        <p:spPr>
+          <a:xfrm>
+            <a:off x="640080" y="6199632"/>
+            <a:ext cx="2743200" cy="214630"/>
+          </a:xfrm>
+          <a:prstGeom prst="rect">
+            <a:avLst/>
+          </a:prstGeom>
+          <a:noFill/>
+          <a:ln/>
+        </p:spPr>
+        <p:txBody>
+          <a:bodyPr wrap="square" lIns="0" tIns="0" rIns="0" bIns="0" rtlCol="0" anchor="ctr"/>
+          <a:lstStyle/>
+          <a:p>
+            <a:pPr algn="l" indent="0" marL="0">
+              <a:buNone/>
+            </a:pPr>
+            <a:r>
+              <a:rPr lang="en-US" sz="1300" spc="442" kern="0" dirty="0">
+                <a:solidFill>
+                  <a:srgbClr val="C9A227"/>
+                </a:solidFill>
+                <a:latin typeface="Baskervville" pitchFamily="34" charset="0"/>
+                <a:ea typeface="Baskervville" pitchFamily="34" charset="-122"/>
+                <a:cs typeface="Baskervville" pitchFamily="34" charset="-120"/>
+              </a:rPr>
+              <a:t>COMPOSE</a:t>
+            </a:r>
+            <a:endParaRPr lang="en-US" sz="1300" dirty="0"/>
+          </a:p>
+        </p:txBody>
+      </p:sp>
+      <p:sp>
+        <p:nvSpPr>
+          <p:cNvPr id="18" name="Text 16"/>
           <p:cNvSpPr/>
           <p:nvPr/>
         </p:nvSpPr>
@@ -4002,7 +4085,7 @@
             <a:r>
               <a:rPr lang="en-US" sz="1100" dirty="0">
                 <a:solidFill>
-                  <a:srgbClr val="5E5A54"/>
+                  <a:srgbClr val="8A8177"/>
                 </a:solidFill>
                 <a:latin typeface="Roboto Mono" pitchFamily="34" charset="0"/>
                 <a:ea typeface="Roboto Mono" pitchFamily="34" charset="-122"/>
@@ -4028,7 +4111,7 @@
     <p:bg>
       <p:bgPr>
         <a:solidFill>
-          <a:srgbClr val="F7F6F2"/>
+          <a:srgbClr val="1A1613"/>
         </a:solidFill>
       </p:bgPr>
     </p:bg>
@@ -4096,7 +4179,7 @@
             <a:r>
               <a:rPr lang="en-US" sz="3400" b="1" dirty="0">
                 <a:solidFill>
-                  <a:srgbClr val="1E1E1E"/>
+                  <a:srgbClr val="F2EFE9"/>
                 </a:solidFill>
                 <a:latin typeface="Baskervville" pitchFamily="34" charset="0"/>
                 <a:ea typeface="Baskervville" pitchFamily="34" charset="-122"/>
@@ -4253,7 +4336,7 @@
             <a:r>
               <a:rPr lang="en-US" sz="5000" b="1" dirty="0">
                 <a:solidFill>
-                  <a:srgbClr val="1E1E1E"/>
+                  <a:srgbClr val="1A1613"/>
                 </a:solidFill>
                 <a:latin typeface="Baskervville" pitchFamily="34" charset="0"/>
                 <a:ea typeface="Baskervville" pitchFamily="34" charset="-122"/>
@@ -4292,7 +4375,7 @@
             <a:r>
               <a:rPr lang="en-US" sz="1400" dirty="0">
                 <a:solidFill>
-                  <a:srgbClr val="1E1E1E"/>
+                  <a:srgbClr val="1A1613"/>
                 </a:solidFill>
                 <a:latin typeface="Satoshi" pitchFamily="34" charset="0"/>
                 <a:ea typeface="Satoshi" pitchFamily="34" charset="-122"/>
@@ -4417,7 +4500,7 @@
             <a:avLst/>
           </a:prstGeom>
           <a:solidFill>
-            <a:srgbClr val="1E1E1E"/>
+            <a:srgbClr val="F2EFE9"/>
           </a:solidFill>
           <a:ln/>
         </p:spPr>
@@ -4449,7 +4532,7 @@
             <a:r>
               <a:rPr lang="en-US" sz="5000" b="1" dirty="0">
                 <a:solidFill>
-                  <a:srgbClr val="FFFFFF"/>
+                  <a:srgbClr val="1A1613"/>
                 </a:solidFill>
                 <a:latin typeface="Baskervville" pitchFamily="34" charset="0"/>
                 <a:ea typeface="Baskervville" pitchFamily="34" charset="-122"/>
@@ -4488,7 +4571,7 @@
             <a:r>
               <a:rPr lang="en-US" sz="1400" dirty="0">
                 <a:solidFill>
-                  <a:srgbClr val="FFFFFF"/>
+                  <a:srgbClr val="1A1613"/>
                 </a:solidFill>
                 <a:latin typeface="Satoshi" pitchFamily="34" charset="0"/>
                 <a:ea typeface="Satoshi" pitchFamily="34" charset="-122"/>
@@ -4518,21 +4601,21 @@
           </a:prstGeom>
           <a:solidFill>
             <a:srgbClr val="FFFFFF">
-              <a:alpha val="72000"/>
+              <a:alpha val="18000"/>
             </a:srgbClr>
           </a:solidFill>
-          <a:ln w="19050">
+          <a:ln w="12700">
             <a:solidFill>
               <a:srgbClr val="FFFFFF">
-                <a:alpha val="90000"/>
+                <a:alpha val="32000"/>
               </a:srgbClr>
             </a:solidFill>
             <a:prstDash val="solid"/>
           </a:ln>
           <a:effectLst>
-            <a:outerShdw sx="100000" sy="100000" kx="0" ky="0" algn="bl" rotWithShape="0" blurRad="203200" dist="63500" dir="5400000">
+            <a:outerShdw sx="100000" sy="100000" kx="0" ky="0" algn="bl" rotWithShape="0" blurRad="228600" dist="76200" dir="5400000">
               <a:srgbClr val="000000">
-                <a:alpha val="14000"/>
+                <a:alpha val="40000"/>
               </a:srgbClr>
             </a:outerShdw>
           </a:effectLst>
@@ -4585,7 +4668,7 @@
             <a:r>
               <a:rPr lang="en-US" sz="1700" b="1" dirty="0">
                 <a:solidFill>
-                  <a:srgbClr val="1E1E1E"/>
+                  <a:srgbClr val="F2EFE9"/>
                 </a:solidFill>
                 <a:latin typeface="Baskervville" pitchFamily="34" charset="0"/>
                 <a:ea typeface="Baskervville" pitchFamily="34" charset="-122"/>
@@ -4624,7 +4707,7 @@
             <a:r>
               <a:rPr lang="en-US" sz="1350" dirty="0">
                 <a:solidFill>
-                  <a:srgbClr val="5E5A54"/>
+                  <a:srgbClr val="B3AA9E"/>
                 </a:solidFill>
                 <a:latin typeface="Satoshi" pitchFamily="34" charset="0"/>
                 <a:ea typeface="Satoshi" pitchFamily="34" charset="-122"/>
@@ -4654,21 +4737,21 @@
           </a:prstGeom>
           <a:solidFill>
             <a:srgbClr val="FFFFFF">
-              <a:alpha val="72000"/>
+              <a:alpha val="18000"/>
             </a:srgbClr>
           </a:solidFill>
-          <a:ln w="19050">
+          <a:ln w="12700">
             <a:solidFill>
               <a:srgbClr val="FFFFFF">
-                <a:alpha val="90000"/>
+                <a:alpha val="32000"/>
               </a:srgbClr>
             </a:solidFill>
             <a:prstDash val="solid"/>
           </a:ln>
           <a:effectLst>
-            <a:outerShdw sx="100000" sy="100000" kx="0" ky="0" algn="bl" rotWithShape="0" blurRad="203200" dist="63500" dir="5400000">
+            <a:outerShdw sx="100000" sy="100000" kx="0" ky="0" algn="bl" rotWithShape="0" blurRad="228600" dist="76200" dir="5400000">
               <a:srgbClr val="000000">
-                <a:alpha val="14000"/>
+                <a:alpha val="40000"/>
               </a:srgbClr>
             </a:outerShdw>
           </a:effectLst>
@@ -4721,7 +4804,7 @@
             <a:r>
               <a:rPr lang="en-US" sz="1700" b="1" dirty="0">
                 <a:solidFill>
-                  <a:srgbClr val="1E1E1E"/>
+                  <a:srgbClr val="F2EFE9"/>
                 </a:solidFill>
                 <a:latin typeface="Baskervville" pitchFamily="34" charset="0"/>
                 <a:ea typeface="Baskervville" pitchFamily="34" charset="-122"/>
@@ -4760,7 +4843,7 @@
             <a:r>
               <a:rPr lang="en-US" sz="1350" dirty="0">
                 <a:solidFill>
-                  <a:srgbClr val="5E5A54"/>
+                  <a:srgbClr val="B3AA9E"/>
                 </a:solidFill>
                 <a:latin typeface="Satoshi" pitchFamily="34" charset="0"/>
                 <a:ea typeface="Satoshi" pitchFamily="34" charset="-122"/>
@@ -4790,21 +4873,21 @@
           </a:prstGeom>
           <a:solidFill>
             <a:srgbClr val="FFFFFF">
-              <a:alpha val="72000"/>
+              <a:alpha val="18000"/>
             </a:srgbClr>
           </a:solidFill>
-          <a:ln w="19050">
+          <a:ln w="12700">
             <a:solidFill>
               <a:srgbClr val="FFFFFF">
-                <a:alpha val="90000"/>
+                <a:alpha val="32000"/>
               </a:srgbClr>
             </a:solidFill>
             <a:prstDash val="solid"/>
           </a:ln>
           <a:effectLst>
-            <a:outerShdw sx="100000" sy="100000" kx="0" ky="0" algn="bl" rotWithShape="0" blurRad="203200" dist="63500" dir="5400000">
+            <a:outerShdw sx="100000" sy="100000" kx="0" ky="0" algn="bl" rotWithShape="0" blurRad="228600" dist="76200" dir="5400000">
               <a:srgbClr val="000000">
-                <a:alpha val="14000"/>
+                <a:alpha val="40000"/>
               </a:srgbClr>
             </a:outerShdw>
           </a:effectLst>
@@ -4857,7 +4940,7 @@
             <a:r>
               <a:rPr lang="en-US" sz="1700" b="1" dirty="0">
                 <a:solidFill>
-                  <a:srgbClr val="1E1E1E"/>
+                  <a:srgbClr val="F2EFE9"/>
                 </a:solidFill>
                 <a:latin typeface="Baskervville" pitchFamily="34" charset="0"/>
                 <a:ea typeface="Baskervville" pitchFamily="34" charset="-122"/>
@@ -4896,7 +4979,7 @@
             <a:r>
               <a:rPr lang="en-US" sz="1350" dirty="0">
                 <a:solidFill>
-                  <a:srgbClr val="5E5A54"/>
+                  <a:srgbClr val="B3AA9E"/>
                 </a:solidFill>
                 <a:latin typeface="Satoshi" pitchFamily="34" charset="0"/>
                 <a:ea typeface="Satoshi" pitchFamily="34" charset="-122"/>
@@ -4926,21 +5009,21 @@
           </a:prstGeom>
           <a:solidFill>
             <a:srgbClr val="FFFFFF">
-              <a:alpha val="72000"/>
+              <a:alpha val="18000"/>
             </a:srgbClr>
           </a:solidFill>
-          <a:ln w="19050">
+          <a:ln w="12700">
             <a:solidFill>
               <a:srgbClr val="FFFFFF">
-                <a:alpha val="90000"/>
+                <a:alpha val="32000"/>
               </a:srgbClr>
             </a:solidFill>
             <a:prstDash val="solid"/>
           </a:ln>
           <a:effectLst>
-            <a:outerShdw sx="100000" sy="100000" kx="0" ky="0" algn="bl" rotWithShape="0" blurRad="203200" dist="63500" dir="5400000">
+            <a:outerShdw sx="100000" sy="100000" kx="0" ky="0" algn="bl" rotWithShape="0" blurRad="228600" dist="76200" dir="5400000">
               <a:srgbClr val="000000">
-                <a:alpha val="14000"/>
+                <a:alpha val="40000"/>
               </a:srgbClr>
             </a:outerShdw>
           </a:effectLst>
@@ -4961,7 +5044,7 @@
             <a:avLst/>
           </a:prstGeom>
           <a:solidFill>
-            <a:srgbClr val="1E1E1E"/>
+            <a:srgbClr val="F2EFE9"/>
           </a:solidFill>
           <a:ln/>
         </p:spPr>
@@ -4993,7 +5076,7 @@
             <a:r>
               <a:rPr lang="en-US" sz="1700" b="1" dirty="0">
                 <a:solidFill>
-                  <a:srgbClr val="1E1E1E"/>
+                  <a:srgbClr val="F2EFE9"/>
                 </a:solidFill>
                 <a:latin typeface="Baskervville" pitchFamily="34" charset="0"/>
                 <a:ea typeface="Baskervville" pitchFamily="34" charset="-122"/>
@@ -5032,7 +5115,7 @@
             <a:r>
               <a:rPr lang="en-US" sz="1350" dirty="0">
                 <a:solidFill>
-                  <a:srgbClr val="5E5A54"/>
+                  <a:srgbClr val="B3AA9E"/>
                 </a:solidFill>
                 <a:latin typeface="Satoshi" pitchFamily="34" charset="0"/>
                 <a:ea typeface="Satoshi" pitchFamily="34" charset="-122"/>
@@ -5044,33 +5127,48 @@
           </a:p>
         </p:txBody>
       </p:sp>
-      <p:pic>
-        <p:nvPicPr>
-          <p:cNvPr id="32" name="Image 0" descr="/private/tmp/claude-501/-Users-shazzadul-Documents-Projects-AI-Hackathon/897b972a-c7fd-436b-8660-8d0ac214ab10/scratchpad/deck/logo.png">    </p:cNvPr>
-          <p:cNvPicPr>
-            <a:picLocks noChangeAspect="1"/>
-          </p:cNvPicPr>
-          <p:nvPr/>
-        </p:nvPicPr>
-        <p:blipFill>
-          <a:blip r:embed="rId1"/>
-          <a:stretch>
-            <a:fillRect/>
-          </a:stretch>
-        </p:blipFill>
-        <p:spPr>
-          <a:xfrm>
-            <a:off x="640080" y="6236208"/>
-            <a:ext cx="1051560" cy="275183"/>
-          </a:xfrm>
-          <a:prstGeom prst="rect">
-            <a:avLst/>
-          </a:prstGeom>
-        </p:spPr>
-      </p:pic>
-      <p:sp>
-        <p:nvSpPr>
-          <p:cNvPr id="33" name="Text 30"/>
+      <p:sp>
+        <p:nvSpPr>
+          <p:cNvPr id="32" name="Text 30"/>
+          <p:cNvSpPr/>
+          <p:nvPr/>
+        </p:nvSpPr>
+        <p:spPr>
+          <a:xfrm>
+            <a:off x="640080" y="6199632"/>
+            <a:ext cx="2743200" cy="214630"/>
+          </a:xfrm>
+          <a:prstGeom prst="rect">
+            <a:avLst/>
+          </a:prstGeom>
+          <a:noFill/>
+          <a:ln/>
+        </p:spPr>
+        <p:txBody>
+          <a:bodyPr wrap="square" lIns="0" tIns="0" rIns="0" bIns="0" rtlCol="0" anchor="ctr"/>
+          <a:lstStyle/>
+          <a:p>
+            <a:pPr algn="l" indent="0" marL="0">
+              <a:buNone/>
+            </a:pPr>
+            <a:r>
+              <a:rPr lang="en-US" sz="1300" spc="442" kern="0" dirty="0">
+                <a:solidFill>
+                  <a:srgbClr val="C9A227"/>
+                </a:solidFill>
+                <a:latin typeface="Baskervville" pitchFamily="34" charset="0"/>
+                <a:ea typeface="Baskervville" pitchFamily="34" charset="-122"/>
+                <a:cs typeface="Baskervville" pitchFamily="34" charset="-120"/>
+              </a:rPr>
+              <a:t>COMPOSE</a:t>
+            </a:r>
+            <a:endParaRPr lang="en-US" sz="1300" dirty="0"/>
+          </a:p>
+        </p:txBody>
+      </p:sp>
+      <p:sp>
+        <p:nvSpPr>
+          <p:cNvPr id="33" name="Text 31"/>
           <p:cNvSpPr/>
           <p:nvPr/>
         </p:nvSpPr>
@@ -5095,7 +5193,7 @@
             <a:r>
               <a:rPr lang="en-US" sz="1100" dirty="0">
                 <a:solidFill>
-                  <a:srgbClr val="5E5A54"/>
+                  <a:srgbClr val="8A8177"/>
                 </a:solidFill>
                 <a:latin typeface="Roboto Mono" pitchFamily="34" charset="0"/>
                 <a:ea typeface="Roboto Mono" pitchFamily="34" charset="-122"/>
@@ -5121,7 +5219,7 @@
     <p:bg>
       <p:bgPr>
         <a:solidFill>
-          <a:srgbClr val="F7F6F2"/>
+          <a:srgbClr val="1A1613"/>
         </a:solidFill>
       </p:bgPr>
     </p:bg>
@@ -5207,93 +5305,108 @@
         </p:nvSpPr>
         <p:spPr>
           <a:xfrm>
-            <a:off x="2377440" y="1508760"/>
-            <a:ext cx="7434072" cy="3931920"/>
+            <a:off x="2377440" y="1783080"/>
+            <a:ext cx="7434072" cy="3017520"/>
           </a:xfrm>
           <a:prstGeom prst="roundRect">
             <a:avLst>
-              <a:gd name="adj" fmla="val 3721"/>
+              <a:gd name="adj" fmla="val 4848"/>
             </a:avLst>
           </a:prstGeom>
           <a:solidFill>
             <a:srgbClr val="FFFFFF">
-              <a:alpha val="70000"/>
+              <a:alpha val="12000"/>
             </a:srgbClr>
           </a:solidFill>
-          <a:ln w="19050">
+          <a:ln w="12700">
             <a:solidFill>
               <a:srgbClr val="FFFFFF">
-                <a:alpha val="90000"/>
+                <a:alpha val="32000"/>
               </a:srgbClr>
             </a:solidFill>
             <a:prstDash val="solid"/>
           </a:ln>
           <a:effectLst>
-            <a:outerShdw sx="100000" sy="100000" kx="0" ky="0" algn="bl" rotWithShape="0" blurRad="203200" dist="63500" dir="5400000">
+            <a:outerShdw sx="100000" sy="100000" kx="0" ky="0" algn="bl" rotWithShape="0" blurRad="228600" dist="76200" dir="5400000">
               <a:srgbClr val="000000">
-                <a:alpha val="14000"/>
+                <a:alpha val="40000"/>
               </a:srgbClr>
             </a:outerShdw>
           </a:effectLst>
         </p:spPr>
       </p:sp>
-      <p:pic>
-        <p:nvPicPr>
-          <p:cNvPr id="6" name="Image 0" descr="/private/tmp/claude-501/-Users-shazzadul-Documents-Projects-AI-Hackathon/897b972a-c7fd-436b-8660-8d0ac214ab10/scratchpad/deck/logo.png">    </p:cNvPr>
-          <p:cNvPicPr>
-            <a:picLocks noChangeAspect="1"/>
-          </p:cNvPicPr>
-          <p:nvPr/>
-        </p:nvPicPr>
-        <p:blipFill>
-          <a:blip r:embed="rId1"/>
-          <a:stretch>
-            <a:fillRect/>
-          </a:stretch>
-        </p:blipFill>
-        <p:spPr>
-          <a:xfrm>
-            <a:off x="3108960" y="2057400"/>
-            <a:ext cx="5971032" cy="1562563"/>
-          </a:xfrm>
-          <a:prstGeom prst="rect">
-            <a:avLst/>
-          </a:prstGeom>
-        </p:spPr>
-      </p:pic>
-      <p:sp>
-        <p:nvSpPr>
-          <p:cNvPr id="7" name="Text 4"/>
-          <p:cNvSpPr/>
-          <p:nvPr/>
-        </p:nvSpPr>
-        <p:spPr>
-          <a:xfrm>
-            <a:off x="2377440" y="3886200"/>
-            <a:ext cx="7434072" cy="548640"/>
-          </a:xfrm>
-          <a:prstGeom prst="rect">
-            <a:avLst/>
-          </a:prstGeom>
-          <a:noFill/>
-          <a:ln/>
-        </p:spPr>
-        <p:txBody>
-          <a:bodyPr wrap="square" lIns="0" tIns="0" rIns="0" bIns="0" rtlCol="0" anchor="t"/>
+      <p:sp>
+        <p:nvSpPr>
+          <p:cNvPr id="6" name="Text 4"/>
+          <p:cNvSpPr/>
+          <p:nvPr/>
+        </p:nvSpPr>
+        <p:spPr>
+          <a:xfrm>
+            <a:off x="2494026" y="2240280"/>
+            <a:ext cx="7434072" cy="891540"/>
+          </a:xfrm>
+          <a:prstGeom prst="rect">
+            <a:avLst/>
+          </a:prstGeom>
+          <a:noFill/>
+          <a:ln/>
+        </p:spPr>
+        <p:txBody>
+          <a:bodyPr wrap="square" lIns="0" tIns="0" rIns="0" bIns="0" rtlCol="0" anchor="ctr"/>
           <a:lstStyle/>
           <a:p>
             <a:pPr algn="ctr" indent="0" marL="0">
               <a:buNone/>
             </a:pPr>
             <a:r>
-              <a:rPr lang="en-US" sz="2600" b="1" dirty="0">
-                <a:solidFill>
-                  <a:srgbClr val="1E1E1E"/>
+              <a:rPr lang="en-US" sz="5400" spc="1836" kern="0" dirty="0">
+                <a:solidFill>
+                  <a:srgbClr val="C9A227"/>
                 </a:solidFill>
                 <a:latin typeface="Baskervville" pitchFamily="34" charset="0"/>
                 <a:ea typeface="Baskervville" pitchFamily="34" charset="-122"/>
                 <a:cs typeface="Baskervville" pitchFamily="34" charset="-120"/>
               </a:rPr>
+              <a:t>COMPOSE</a:t>
+            </a:r>
+            <a:endParaRPr lang="en-US" sz="5400" dirty="0"/>
+          </a:p>
+        </p:txBody>
+      </p:sp>
+      <p:sp>
+        <p:nvSpPr>
+          <p:cNvPr id="7" name="Text 5"/>
+          <p:cNvSpPr/>
+          <p:nvPr/>
+        </p:nvSpPr>
+        <p:spPr>
+          <a:xfrm>
+            <a:off x="2377440" y="3291840"/>
+            <a:ext cx="7434072" cy="548640"/>
+          </a:xfrm>
+          <a:prstGeom prst="rect">
+            <a:avLst/>
+          </a:prstGeom>
+          <a:noFill/>
+          <a:ln/>
+        </p:spPr>
+        <p:txBody>
+          <a:bodyPr wrap="square" lIns="0" tIns="0" rIns="0" bIns="0" rtlCol="0" anchor="t"/>
+          <a:lstStyle/>
+          <a:p>
+            <a:pPr algn="ctr" indent="0" marL="0">
+              <a:buNone/>
+            </a:pPr>
+            <a:r>
+              <a:rPr lang="en-US" sz="2600" b="1" dirty="0">
+                <a:solidFill>
+                  <a:srgbClr val="F2EFE9"/>
+                </a:solidFill>
+                <a:latin typeface="Baskervville" pitchFamily="34" charset="0"/>
+                <a:ea typeface="Baskervville" pitchFamily="34" charset="-122"/>
+                <a:cs typeface="Baskervville" pitchFamily="34" charset="-120"/>
+              </a:rPr>
               <a:t>From draft to design, in minutes.</a:t>
             </a:r>
             <a:endParaRPr lang="en-US" sz="2600" dirty="0"/>
@@ -5302,13 +5415,13 @@
       </p:sp>
       <p:sp>
         <p:nvSpPr>
-          <p:cNvPr id="8" name="Text 5"/>
-          <p:cNvSpPr/>
-          <p:nvPr/>
-        </p:nvSpPr>
-        <p:spPr>
-          <a:xfrm>
-            <a:off x="2377440" y="4572000"/>
+          <p:cNvPr id="8" name="Text 6"/>
+          <p:cNvSpPr/>
+          <p:nvPr/>
+        </p:nvSpPr>
+        <p:spPr>
+          <a:xfrm>
+            <a:off x="2377440" y="4023360"/>
             <a:ext cx="7434072" cy="365760"/>
           </a:xfrm>
           <a:prstGeom prst="rect">
